--- a/images/fig-design.pptx
+++ b/images/fig-design.pptx
@@ -7,9 +7,10 @@
   <p:sldIdLst>
     <p:sldId id="256" r:id="rId2"/>
     <p:sldId id="257" r:id="rId3"/>
-    <p:sldId id="258" r:id="rId4"/>
-    <p:sldId id="260" r:id="rId5"/>
-    <p:sldId id="259" r:id="rId6"/>
+    <p:sldId id="261" r:id="rId4"/>
+    <p:sldId id="258" r:id="rId5"/>
+    <p:sldId id="260" r:id="rId6"/>
+    <p:sldId id="259" r:id="rId7"/>
   </p:sldIdLst>
   <p:sldSz cx="12192000" cy="6858000"/>
   <p:notesSz cx="6858000" cy="9144000"/>
@@ -126,29 +127,6 @@
 
 <file path=ppt/changesInfos/changesInfo1.xml><?xml version="1.0" encoding="utf-8"?>
 <pc:chgInfo xmlns:a="http://schemas.openxmlformats.org/drawingml/2006/main" xmlns:r="http://schemas.openxmlformats.org/officeDocument/2006/relationships" xmlns:ac="http://schemas.microsoft.com/office/drawing/2013/main/command" xmlns:pc="http://schemas.microsoft.com/office/powerpoint/2013/main/command">
-  <pc:docChgLst>
-    <pc:chgData name="Roar Bakken Stovner" userId="a2d03bef-3036-4670-b46d-ce184aacf6f6" providerId="ADAL" clId="{DC5F3C88-F149-41BB-99F7-767016E0A2D8}"/>
-    <pc:docChg chg="undo redo custSel addSld modSld">
-      <pc:chgData name="Roar Bakken Stovner" userId="a2d03bef-3036-4670-b46d-ce184aacf6f6" providerId="ADAL" clId="{DC5F3C88-F149-41BB-99F7-767016E0A2D8}" dt="2025-05-13T05:29:15.220" v="543" actId="1076"/>
-      <pc:docMkLst>
-        <pc:docMk/>
-      </pc:docMkLst>
-      <pc:sldChg chg="addSp delSp modSp mod">
-        <pc:chgData name="Roar Bakken Stovner" userId="a2d03bef-3036-4670-b46d-ce184aacf6f6" providerId="ADAL" clId="{DC5F3C88-F149-41BB-99F7-767016E0A2D8}" dt="2025-05-12T08:31:24.576" v="435" actId="20577"/>
-        <pc:sldMkLst>
-          <pc:docMk/>
-          <pc:sldMk cId="921670182" sldId="256"/>
-        </pc:sldMkLst>
-      </pc:sldChg>
-      <pc:sldChg chg="addSp delSp modSp new mod">
-        <pc:chgData name="Roar Bakken Stovner" userId="a2d03bef-3036-4670-b46d-ce184aacf6f6" providerId="ADAL" clId="{DC5F3C88-F149-41BB-99F7-767016E0A2D8}" dt="2025-05-13T05:29:15.220" v="543" actId="1076"/>
-        <pc:sldMkLst>
-          <pc:docMk/>
-          <pc:sldMk cId="1138742646" sldId="257"/>
-        </pc:sldMkLst>
-      </pc:sldChg>
-    </pc:docChg>
-  </pc:docChgLst>
   <pc:docChgLst>
     <pc:chgData name="Roar Bakken Stovner" userId="a2d03bef-3036-4670-b46d-ce184aacf6f6" providerId="ADAL" clId="{50FBA415-739B-4330-BB12-91FA819A2CB3}"/>
     <pc:docChg chg="undo redo custSel addSld delSld modSld sldOrd">
@@ -424,6 +402,29 @@
     </pc:docChg>
   </pc:docChgLst>
   <pc:docChgLst>
+    <pc:chgData name="Roar Bakken Stovner" userId="a2d03bef-3036-4670-b46d-ce184aacf6f6" providerId="ADAL" clId="{DC5F3C88-F149-41BB-99F7-767016E0A2D8}"/>
+    <pc:docChg chg="undo redo custSel addSld modSld">
+      <pc:chgData name="Roar Bakken Stovner" userId="a2d03bef-3036-4670-b46d-ce184aacf6f6" providerId="ADAL" clId="{DC5F3C88-F149-41BB-99F7-767016E0A2D8}" dt="2025-05-13T05:29:15.220" v="543" actId="1076"/>
+      <pc:docMkLst>
+        <pc:docMk/>
+      </pc:docMkLst>
+      <pc:sldChg chg="addSp delSp modSp mod">
+        <pc:chgData name="Roar Bakken Stovner" userId="a2d03bef-3036-4670-b46d-ce184aacf6f6" providerId="ADAL" clId="{DC5F3C88-F149-41BB-99F7-767016E0A2D8}" dt="2025-05-12T08:31:24.576" v="435" actId="20577"/>
+        <pc:sldMkLst>
+          <pc:docMk/>
+          <pc:sldMk cId="921670182" sldId="256"/>
+        </pc:sldMkLst>
+      </pc:sldChg>
+      <pc:sldChg chg="addSp delSp modSp new mod">
+        <pc:chgData name="Roar Bakken Stovner" userId="a2d03bef-3036-4670-b46d-ce184aacf6f6" providerId="ADAL" clId="{DC5F3C88-F149-41BB-99F7-767016E0A2D8}" dt="2025-05-13T05:29:15.220" v="543" actId="1076"/>
+        <pc:sldMkLst>
+          <pc:docMk/>
+          <pc:sldMk cId="1138742646" sldId="257"/>
+        </pc:sldMkLst>
+      </pc:sldChg>
+    </pc:docChg>
+  </pc:docChgLst>
+  <pc:docChgLst>
     <pc:chgData name="Roar Bakken Stovner" userId="a2d03bef-3036-4670-b46d-ce184aacf6f6" providerId="ADAL" clId="{2F6687FE-AE12-4B8F-83ED-A5E520814340}"/>
     <pc:docChg chg="custSel addSld modSld">
       <pc:chgData name="Roar Bakken Stovner" userId="a2d03bef-3036-4670-b46d-ce184aacf6f6" providerId="ADAL" clId="{2F6687FE-AE12-4B8F-83ED-A5E520814340}" dt="2025-05-22T11:31:47.949" v="411" actId="6549"/>
@@ -591,7 +592,7 @@
           <a:p>
             <a:fld id="{C41F1D51-6559-429C-8767-371936093D5C}" type="datetimeFigureOut">
               <a:rPr lang="nb-NO" smtClean="0"/>
-              <a:t>05.06.2025</a:t>
+              <a:t>03.07.2026</a:t>
             </a:fld>
             <a:endParaRPr lang="nb-NO"/>
           </a:p>
@@ -791,7 +792,7 @@
           <a:p>
             <a:fld id="{C41F1D51-6559-429C-8767-371936093D5C}" type="datetimeFigureOut">
               <a:rPr lang="nb-NO" smtClean="0"/>
-              <a:t>05.06.2025</a:t>
+              <a:t>03.07.2026</a:t>
             </a:fld>
             <a:endParaRPr lang="nb-NO"/>
           </a:p>
@@ -1001,7 +1002,7 @@
           <a:p>
             <a:fld id="{C41F1D51-6559-429C-8767-371936093D5C}" type="datetimeFigureOut">
               <a:rPr lang="nb-NO" smtClean="0"/>
-              <a:t>05.06.2025</a:t>
+              <a:t>03.07.2026</a:t>
             </a:fld>
             <a:endParaRPr lang="nb-NO"/>
           </a:p>
@@ -1201,7 +1202,7 @@
           <a:p>
             <a:fld id="{C41F1D51-6559-429C-8767-371936093D5C}" type="datetimeFigureOut">
               <a:rPr lang="nb-NO" smtClean="0"/>
-              <a:t>05.06.2025</a:t>
+              <a:t>03.07.2026</a:t>
             </a:fld>
             <a:endParaRPr lang="nb-NO"/>
           </a:p>
@@ -1477,7 +1478,7 @@
           <a:p>
             <a:fld id="{C41F1D51-6559-429C-8767-371936093D5C}" type="datetimeFigureOut">
               <a:rPr lang="nb-NO" smtClean="0"/>
-              <a:t>05.06.2025</a:t>
+              <a:t>03.07.2026</a:t>
             </a:fld>
             <a:endParaRPr lang="nb-NO"/>
           </a:p>
@@ -1745,7 +1746,7 @@
           <a:p>
             <a:fld id="{C41F1D51-6559-429C-8767-371936093D5C}" type="datetimeFigureOut">
               <a:rPr lang="nb-NO" smtClean="0"/>
-              <a:t>05.06.2025</a:t>
+              <a:t>03.07.2026</a:t>
             </a:fld>
             <a:endParaRPr lang="nb-NO"/>
           </a:p>
@@ -2160,7 +2161,7 @@
           <a:p>
             <a:fld id="{C41F1D51-6559-429C-8767-371936093D5C}" type="datetimeFigureOut">
               <a:rPr lang="nb-NO" smtClean="0"/>
-              <a:t>05.06.2025</a:t>
+              <a:t>03.07.2026</a:t>
             </a:fld>
             <a:endParaRPr lang="nb-NO"/>
           </a:p>
@@ -2302,7 +2303,7 @@
           <a:p>
             <a:fld id="{C41F1D51-6559-429C-8767-371936093D5C}" type="datetimeFigureOut">
               <a:rPr lang="nb-NO" smtClean="0"/>
-              <a:t>05.06.2025</a:t>
+              <a:t>03.07.2026</a:t>
             </a:fld>
             <a:endParaRPr lang="nb-NO"/>
           </a:p>
@@ -2415,7 +2416,7 @@
           <a:p>
             <a:fld id="{C41F1D51-6559-429C-8767-371936093D5C}" type="datetimeFigureOut">
               <a:rPr lang="nb-NO" smtClean="0"/>
-              <a:t>05.06.2025</a:t>
+              <a:t>03.07.2026</a:t>
             </a:fld>
             <a:endParaRPr lang="nb-NO"/>
           </a:p>
@@ -2728,7 +2729,7 @@
           <a:p>
             <a:fld id="{C41F1D51-6559-429C-8767-371936093D5C}" type="datetimeFigureOut">
               <a:rPr lang="nb-NO" smtClean="0"/>
-              <a:t>05.06.2025</a:t>
+              <a:t>03.07.2026</a:t>
             </a:fld>
             <a:endParaRPr lang="nb-NO"/>
           </a:p>
@@ -3017,7 +3018,7 @@
           <a:p>
             <a:fld id="{C41F1D51-6559-429C-8767-371936093D5C}" type="datetimeFigureOut">
               <a:rPr lang="nb-NO" smtClean="0"/>
-              <a:t>05.06.2025</a:t>
+              <a:t>03.07.2026</a:t>
             </a:fld>
             <a:endParaRPr lang="nb-NO"/>
           </a:p>
@@ -3260,7 +3261,7 @@
           <a:p>
             <a:fld id="{C41F1D51-6559-429C-8767-371936093D5C}" type="datetimeFigureOut">
               <a:rPr lang="nb-NO" smtClean="0"/>
-              <a:t>05.06.2025</a:t>
+              <a:t>03.07.2026</a:t>
             </a:fld>
             <a:endParaRPr lang="nb-NO"/>
           </a:p>
@@ -4983,7 +4984,13 @@
   <p:cSld>
     <p:spTree>
       <p:nvGrpSpPr>
-        <p:cNvPr id="1" name=""/>
+        <p:cNvPr id="1" name="">
+          <a:extLst>
+            <a:ext uri="{FF2B5EF4-FFF2-40B4-BE49-F238E27FC236}">
+              <a16:creationId xmlns:a16="http://schemas.microsoft.com/office/drawing/2014/main" id="{8D57A19B-53E4-522B-E31C-652C6392B89D}"/>
+            </a:ext>
+          </a:extLst>
+        </p:cNvPr>
         <p:cNvGrpSpPr/>
         <p:nvPr/>
       </p:nvGrpSpPr>
@@ -4995,86 +5002,953 @@
           <a:chExt cx="0" cy="0"/>
         </a:xfrm>
       </p:grpSpPr>
-      <p:pic>
-        <p:nvPicPr>
-          <p:cNvPr id="3" name="Picture 2" descr="A diagram of a simple algorithm&#10;&#10;AI-generated content may be incorrect.">
-            <a:extLst>
-              <a:ext uri="{FF2B5EF4-FFF2-40B4-BE49-F238E27FC236}">
-                <a16:creationId xmlns:a16="http://schemas.microsoft.com/office/drawing/2014/main" id="{2C8ED2CD-828B-7CBA-E6D3-3D0CD4FD32E7}"/>
-              </a:ext>
-            </a:extLst>
-          </p:cNvPr>
-          <p:cNvPicPr>
-            <a:picLocks noChangeAspect="1"/>
-          </p:cNvPicPr>
+      <p:sp>
+        <p:nvSpPr>
+          <p:cNvPr id="2" name="Oval 1">
+            <a:extLst>
+              <a:ext uri="{FF2B5EF4-FFF2-40B4-BE49-F238E27FC236}">
+                <a16:creationId xmlns:a16="http://schemas.microsoft.com/office/drawing/2014/main" id="{B50DB0D1-9376-7D7F-E62B-23776CF7529A}"/>
+              </a:ext>
+            </a:extLst>
+          </p:cNvPr>
+          <p:cNvSpPr/>
           <p:nvPr/>
-        </p:nvPicPr>
-        <p:blipFill>
-          <a:blip r:embed="rId2">
-            <a:extLst>
-              <a:ext uri="{28A0092B-C50C-407E-A947-70E740481C1C}">
-                <a14:useLocalDpi xmlns:a14="http://schemas.microsoft.com/office/drawing/2010/main" val="0"/>
-              </a:ext>
-            </a:extLst>
-          </a:blip>
-          <a:srcRect t="43372" r="58733"/>
-          <a:stretch>
-            <a:fillRect/>
-          </a:stretch>
-        </p:blipFill>
+        </p:nvSpPr>
         <p:spPr>
           <a:xfrm>
-            <a:off x="990589" y="3035030"/>
-            <a:ext cx="4213709" cy="3365776"/>
+            <a:off x="3599688" y="73152"/>
+            <a:ext cx="4992624" cy="1938528"/>
           </a:xfrm>
-          <a:prstGeom prst="rect">
+          <a:prstGeom prst="ellipse">
             <a:avLst/>
           </a:prstGeom>
+          <a:noFill/>
+          <a:ln>
+            <a:solidFill>
+              <a:schemeClr val="tx1"/>
+            </a:solidFill>
+          </a:ln>
         </p:spPr>
-      </p:pic>
-      <p:pic>
-        <p:nvPicPr>
-          <p:cNvPr id="8" name="Picture 7" descr="A diagram of a simple algorithm&#10;&#10;AI-generated content may be incorrect.">
-            <a:extLst>
-              <a:ext uri="{FF2B5EF4-FFF2-40B4-BE49-F238E27FC236}">
-                <a16:creationId xmlns:a16="http://schemas.microsoft.com/office/drawing/2014/main" id="{A8DEA372-C697-EC4D-16C4-7BF520C0B852}"/>
-              </a:ext>
-            </a:extLst>
-          </p:cNvPr>
-          <p:cNvPicPr>
-            <a:picLocks noChangeAspect="1"/>
-          </p:cNvPicPr>
+        <p:style>
+          <a:lnRef idx="2">
+            <a:schemeClr val="accent1">
+              <a:shade val="15000"/>
+            </a:schemeClr>
+          </a:lnRef>
+          <a:fillRef idx="1">
+            <a:schemeClr val="accent1"/>
+          </a:fillRef>
+          <a:effectRef idx="0">
+            <a:schemeClr val="accent1"/>
+          </a:effectRef>
+          <a:fontRef idx="minor">
+            <a:schemeClr val="lt1"/>
+          </a:fontRef>
+        </p:style>
+        <p:txBody>
+          <a:bodyPr rtlCol="0" anchor="ctr"/>
+          <a:lstStyle/>
+          <a:p>
+            <a:pPr algn="ctr"/>
+            <a:r>
+              <a:rPr lang="nb-NO" sz="2800" b="1" dirty="0">
+                <a:solidFill>
+                  <a:schemeClr val="tx1"/>
+                </a:solidFill>
+              </a:rPr>
+              <a:t>Populasjonen</a:t>
+            </a:r>
+          </a:p>
+        </p:txBody>
+      </p:sp>
+      <p:sp>
+        <p:nvSpPr>
+          <p:cNvPr id="3" name="Freeform: Shape 2">
+            <a:extLst>
+              <a:ext uri="{FF2B5EF4-FFF2-40B4-BE49-F238E27FC236}">
+                <a16:creationId xmlns:a16="http://schemas.microsoft.com/office/drawing/2014/main" id="{80F558BA-40D2-A2D9-02AB-195A62C4EE96}"/>
+              </a:ext>
+            </a:extLst>
+          </p:cNvPr>
+          <p:cNvSpPr/>
           <p:nvPr/>
-        </p:nvPicPr>
-        <p:blipFill>
-          <a:blip r:embed="rId2">
-            <a:extLst>
-              <a:ext uri="{28A0092B-C50C-407E-A947-70E740481C1C}">
-                <a14:useLocalDpi xmlns:a14="http://schemas.microsoft.com/office/drawing/2010/main" val="0"/>
-              </a:ext>
-            </a:extLst>
-          </a:blip>
-          <a:srcRect l="41267" t="18167"/>
-          <a:stretch>
-            <a:fillRect/>
-          </a:stretch>
-        </p:blipFill>
+        </p:nvSpPr>
         <p:spPr>
           <a:xfrm>
-            <a:off x="5204298" y="1536970"/>
-            <a:ext cx="5997111" cy="4863836"/>
+            <a:off x="4414519" y="2592647"/>
+            <a:ext cx="2423197" cy="1410818"/>
           </a:xfrm>
-          <a:prstGeom prst="rect">
+          <a:custGeom>
+            <a:avLst/>
+            <a:gdLst>
+              <a:gd name="connsiteX0" fmla="*/ 1581912 w 2423197"/>
+              <a:gd name="connsiteY0" fmla="*/ 276962 h 1410818"/>
+              <a:gd name="connsiteX1" fmla="*/ 1581912 w 2423197"/>
+              <a:gd name="connsiteY1" fmla="*/ 276962 h 1410818"/>
+              <a:gd name="connsiteX2" fmla="*/ 1737360 w 2423197"/>
+              <a:gd name="connsiteY2" fmla="*/ 286106 h 1410818"/>
+              <a:gd name="connsiteX3" fmla="*/ 1819656 w 2423197"/>
+              <a:gd name="connsiteY3" fmla="*/ 350114 h 1410818"/>
+              <a:gd name="connsiteX4" fmla="*/ 1883664 w 2423197"/>
+              <a:gd name="connsiteY4" fmla="*/ 414122 h 1410818"/>
+              <a:gd name="connsiteX5" fmla="*/ 1993392 w 2423197"/>
+              <a:gd name="connsiteY5" fmla="*/ 478130 h 1410818"/>
+              <a:gd name="connsiteX6" fmla="*/ 2203704 w 2423197"/>
+              <a:gd name="connsiteY6" fmla="*/ 523850 h 1410818"/>
+              <a:gd name="connsiteX7" fmla="*/ 2322576 w 2423197"/>
+              <a:gd name="connsiteY7" fmla="*/ 551282 h 1410818"/>
+              <a:gd name="connsiteX8" fmla="*/ 2423160 w 2423197"/>
+              <a:gd name="connsiteY8" fmla="*/ 633578 h 1410818"/>
+              <a:gd name="connsiteX9" fmla="*/ 2267712 w 2423197"/>
+              <a:gd name="connsiteY9" fmla="*/ 999338 h 1410818"/>
+              <a:gd name="connsiteX10" fmla="*/ 1993392 w 2423197"/>
+              <a:gd name="connsiteY10" fmla="*/ 1237082 h 1410818"/>
+              <a:gd name="connsiteX11" fmla="*/ 1700784 w 2423197"/>
+              <a:gd name="connsiteY11" fmla="*/ 1392530 h 1410818"/>
+              <a:gd name="connsiteX12" fmla="*/ 1581912 w 2423197"/>
+              <a:gd name="connsiteY12" fmla="*/ 1410818 h 1410818"/>
+              <a:gd name="connsiteX13" fmla="*/ 1097280 w 2423197"/>
+              <a:gd name="connsiteY13" fmla="*/ 1374242 h 1410818"/>
+              <a:gd name="connsiteX14" fmla="*/ 777240 w 2423197"/>
+              <a:gd name="connsiteY14" fmla="*/ 1136498 h 1410818"/>
+              <a:gd name="connsiteX15" fmla="*/ 694944 w 2423197"/>
+              <a:gd name="connsiteY15" fmla="*/ 1109066 h 1410818"/>
+              <a:gd name="connsiteX16" fmla="*/ 457200 w 2423197"/>
+              <a:gd name="connsiteY16" fmla="*/ 1072490 h 1410818"/>
+              <a:gd name="connsiteX17" fmla="*/ 329184 w 2423197"/>
+              <a:gd name="connsiteY17" fmla="*/ 1054202 h 1410818"/>
+              <a:gd name="connsiteX18" fmla="*/ 201168 w 2423197"/>
+              <a:gd name="connsiteY18" fmla="*/ 917042 h 1410818"/>
+              <a:gd name="connsiteX19" fmla="*/ 109728 w 2423197"/>
+              <a:gd name="connsiteY19" fmla="*/ 715874 h 1410818"/>
+              <a:gd name="connsiteX20" fmla="*/ 54864 w 2423197"/>
+              <a:gd name="connsiteY20" fmla="*/ 560426 h 1410818"/>
+              <a:gd name="connsiteX21" fmla="*/ 0 w 2423197"/>
+              <a:gd name="connsiteY21" fmla="*/ 423266 h 1410818"/>
+              <a:gd name="connsiteX22" fmla="*/ 36576 w 2423197"/>
+              <a:gd name="connsiteY22" fmla="*/ 240386 h 1410818"/>
+              <a:gd name="connsiteX23" fmla="*/ 137160 w 2423197"/>
+              <a:gd name="connsiteY23" fmla="*/ 148946 h 1410818"/>
+              <a:gd name="connsiteX24" fmla="*/ 246888 w 2423197"/>
+              <a:gd name="connsiteY24" fmla="*/ 94082 h 1410818"/>
+              <a:gd name="connsiteX25" fmla="*/ 475488 w 2423197"/>
+              <a:gd name="connsiteY25" fmla="*/ 66650 h 1410818"/>
+              <a:gd name="connsiteX26" fmla="*/ 740664 w 2423197"/>
+              <a:gd name="connsiteY26" fmla="*/ 75794 h 1410818"/>
+              <a:gd name="connsiteX27" fmla="*/ 850392 w 2423197"/>
+              <a:gd name="connsiteY27" fmla="*/ 84938 h 1410818"/>
+              <a:gd name="connsiteX28" fmla="*/ 1069848 w 2423197"/>
+              <a:gd name="connsiteY28" fmla="*/ 30074 h 1410818"/>
+              <a:gd name="connsiteX29" fmla="*/ 1225296 w 2423197"/>
+              <a:gd name="connsiteY29" fmla="*/ 20930 h 1410818"/>
+              <a:gd name="connsiteX30" fmla="*/ 1399032 w 2423197"/>
+              <a:gd name="connsiteY30" fmla="*/ 112370 h 1410818"/>
+              <a:gd name="connsiteX31" fmla="*/ 1426464 w 2423197"/>
+              <a:gd name="connsiteY31" fmla="*/ 139802 h 1410818"/>
+              <a:gd name="connsiteX32" fmla="*/ 1444752 w 2423197"/>
+              <a:gd name="connsiteY32" fmla="*/ 203810 h 1410818"/>
+              <a:gd name="connsiteX33" fmla="*/ 1463040 w 2423197"/>
+              <a:gd name="connsiteY33" fmla="*/ 240386 h 1410818"/>
+              <a:gd name="connsiteX34" fmla="*/ 1527048 w 2423197"/>
+              <a:gd name="connsiteY34" fmla="*/ 267818 h 1410818"/>
+              <a:gd name="connsiteX35" fmla="*/ 1581912 w 2423197"/>
+              <a:gd name="connsiteY35" fmla="*/ 276962 h 1410818"/>
+            </a:gdLst>
+            <a:ahLst/>
+            <a:cxnLst>
+              <a:cxn ang="0">
+                <a:pos x="connsiteX0" y="connsiteY0"/>
+              </a:cxn>
+              <a:cxn ang="0">
+                <a:pos x="connsiteX1" y="connsiteY1"/>
+              </a:cxn>
+              <a:cxn ang="0">
+                <a:pos x="connsiteX2" y="connsiteY2"/>
+              </a:cxn>
+              <a:cxn ang="0">
+                <a:pos x="connsiteX3" y="connsiteY3"/>
+              </a:cxn>
+              <a:cxn ang="0">
+                <a:pos x="connsiteX4" y="connsiteY4"/>
+              </a:cxn>
+              <a:cxn ang="0">
+                <a:pos x="connsiteX5" y="connsiteY5"/>
+              </a:cxn>
+              <a:cxn ang="0">
+                <a:pos x="connsiteX6" y="connsiteY6"/>
+              </a:cxn>
+              <a:cxn ang="0">
+                <a:pos x="connsiteX7" y="connsiteY7"/>
+              </a:cxn>
+              <a:cxn ang="0">
+                <a:pos x="connsiteX8" y="connsiteY8"/>
+              </a:cxn>
+              <a:cxn ang="0">
+                <a:pos x="connsiteX9" y="connsiteY9"/>
+              </a:cxn>
+              <a:cxn ang="0">
+                <a:pos x="connsiteX10" y="connsiteY10"/>
+              </a:cxn>
+              <a:cxn ang="0">
+                <a:pos x="connsiteX11" y="connsiteY11"/>
+              </a:cxn>
+              <a:cxn ang="0">
+                <a:pos x="connsiteX12" y="connsiteY12"/>
+              </a:cxn>
+              <a:cxn ang="0">
+                <a:pos x="connsiteX13" y="connsiteY13"/>
+              </a:cxn>
+              <a:cxn ang="0">
+                <a:pos x="connsiteX14" y="connsiteY14"/>
+              </a:cxn>
+              <a:cxn ang="0">
+                <a:pos x="connsiteX15" y="connsiteY15"/>
+              </a:cxn>
+              <a:cxn ang="0">
+                <a:pos x="connsiteX16" y="connsiteY16"/>
+              </a:cxn>
+              <a:cxn ang="0">
+                <a:pos x="connsiteX17" y="connsiteY17"/>
+              </a:cxn>
+              <a:cxn ang="0">
+                <a:pos x="connsiteX18" y="connsiteY18"/>
+              </a:cxn>
+              <a:cxn ang="0">
+                <a:pos x="connsiteX19" y="connsiteY19"/>
+              </a:cxn>
+              <a:cxn ang="0">
+                <a:pos x="connsiteX20" y="connsiteY20"/>
+              </a:cxn>
+              <a:cxn ang="0">
+                <a:pos x="connsiteX21" y="connsiteY21"/>
+              </a:cxn>
+              <a:cxn ang="0">
+                <a:pos x="connsiteX22" y="connsiteY22"/>
+              </a:cxn>
+              <a:cxn ang="0">
+                <a:pos x="connsiteX23" y="connsiteY23"/>
+              </a:cxn>
+              <a:cxn ang="0">
+                <a:pos x="connsiteX24" y="connsiteY24"/>
+              </a:cxn>
+              <a:cxn ang="0">
+                <a:pos x="connsiteX25" y="connsiteY25"/>
+              </a:cxn>
+              <a:cxn ang="0">
+                <a:pos x="connsiteX26" y="connsiteY26"/>
+              </a:cxn>
+              <a:cxn ang="0">
+                <a:pos x="connsiteX27" y="connsiteY27"/>
+              </a:cxn>
+              <a:cxn ang="0">
+                <a:pos x="connsiteX28" y="connsiteY28"/>
+              </a:cxn>
+              <a:cxn ang="0">
+                <a:pos x="connsiteX29" y="connsiteY29"/>
+              </a:cxn>
+              <a:cxn ang="0">
+                <a:pos x="connsiteX30" y="connsiteY30"/>
+              </a:cxn>
+              <a:cxn ang="0">
+                <a:pos x="connsiteX31" y="connsiteY31"/>
+              </a:cxn>
+              <a:cxn ang="0">
+                <a:pos x="connsiteX32" y="connsiteY32"/>
+              </a:cxn>
+              <a:cxn ang="0">
+                <a:pos x="connsiteX33" y="connsiteY33"/>
+              </a:cxn>
+              <a:cxn ang="0">
+                <a:pos x="connsiteX34" y="connsiteY34"/>
+              </a:cxn>
+              <a:cxn ang="0">
+                <a:pos x="connsiteX35" y="connsiteY35"/>
+              </a:cxn>
+            </a:cxnLst>
+            <a:rect l="l" t="t" r="r" b="b"/>
+            <a:pathLst>
+              <a:path w="2423197" h="1410818">
+                <a:moveTo>
+                  <a:pt x="1581912" y="276962"/>
+                </a:moveTo>
+                <a:lnTo>
+                  <a:pt x="1581912" y="276962"/>
+                </a:lnTo>
+                <a:lnTo>
+                  <a:pt x="1737360" y="286106"/>
+                </a:lnTo>
+                <a:cubicBezTo>
+                  <a:pt x="1770576" y="296326"/>
+                  <a:pt x="1793502" y="327229"/>
+                  <a:pt x="1819656" y="350114"/>
+                </a:cubicBezTo>
+                <a:cubicBezTo>
+                  <a:pt x="1842364" y="369983"/>
+                  <a:pt x="1860102" y="395273"/>
+                  <a:pt x="1883664" y="414122"/>
+                </a:cubicBezTo>
+                <a:cubicBezTo>
+                  <a:pt x="1887423" y="417129"/>
+                  <a:pt x="1969472" y="470655"/>
+                  <a:pt x="1993392" y="478130"/>
+                </a:cubicBezTo>
+                <a:cubicBezTo>
+                  <a:pt x="2089279" y="508095"/>
+                  <a:pt x="2108419" y="503999"/>
+                  <a:pt x="2203704" y="523850"/>
+                </a:cubicBezTo>
+                <a:cubicBezTo>
+                  <a:pt x="2243515" y="532144"/>
+                  <a:pt x="2282952" y="542138"/>
+                  <a:pt x="2322576" y="551282"/>
+                </a:cubicBezTo>
+                <a:cubicBezTo>
+                  <a:pt x="2335470" y="558650"/>
+                  <a:pt x="2425286" y="599557"/>
+                  <a:pt x="2423160" y="633578"/>
+                </a:cubicBezTo>
+                <a:cubicBezTo>
+                  <a:pt x="2409677" y="849309"/>
+                  <a:pt x="2390340" y="866491"/>
+                  <a:pt x="2267712" y="999338"/>
+                </a:cubicBezTo>
+                <a:cubicBezTo>
+                  <a:pt x="2176133" y="1098548"/>
+                  <a:pt x="2107890" y="1160750"/>
+                  <a:pt x="1993392" y="1237082"/>
+                </a:cubicBezTo>
+                <a:cubicBezTo>
+                  <a:pt x="1940005" y="1272673"/>
+                  <a:pt x="1790343" y="1369167"/>
+                  <a:pt x="1700784" y="1392530"/>
+                </a:cubicBezTo>
+                <a:cubicBezTo>
+                  <a:pt x="1661992" y="1402650"/>
+                  <a:pt x="1621536" y="1404722"/>
+                  <a:pt x="1581912" y="1410818"/>
+                </a:cubicBezTo>
+                <a:cubicBezTo>
+                  <a:pt x="1420368" y="1398626"/>
+                  <a:pt x="1257798" y="1396131"/>
+                  <a:pt x="1097280" y="1374242"/>
+                </a:cubicBezTo>
+                <a:cubicBezTo>
+                  <a:pt x="815845" y="1335865"/>
+                  <a:pt x="1175158" y="1269137"/>
+                  <a:pt x="777240" y="1136498"/>
+                </a:cubicBezTo>
+                <a:cubicBezTo>
+                  <a:pt x="749808" y="1127354"/>
+                  <a:pt x="722908" y="1116425"/>
+                  <a:pt x="694944" y="1109066"/>
+                </a:cubicBezTo>
+                <a:cubicBezTo>
+                  <a:pt x="616049" y="1088304"/>
+                  <a:pt x="538312" y="1083305"/>
+                  <a:pt x="457200" y="1072490"/>
+                </a:cubicBezTo>
+                <a:lnTo>
+                  <a:pt x="329184" y="1054202"/>
+                </a:lnTo>
+                <a:cubicBezTo>
+                  <a:pt x="286512" y="1008482"/>
+                  <a:pt x="235202" y="969510"/>
+                  <a:pt x="201168" y="917042"/>
+                </a:cubicBezTo>
+                <a:cubicBezTo>
+                  <a:pt x="161084" y="855246"/>
+                  <a:pt x="137685" y="784020"/>
+                  <a:pt x="109728" y="715874"/>
+                </a:cubicBezTo>
+                <a:cubicBezTo>
+                  <a:pt x="88872" y="665037"/>
+                  <a:pt x="74158" y="611876"/>
+                  <a:pt x="54864" y="560426"/>
+                </a:cubicBezTo>
+                <a:cubicBezTo>
+                  <a:pt x="37574" y="514319"/>
+                  <a:pt x="18288" y="468986"/>
+                  <a:pt x="0" y="423266"/>
+                </a:cubicBezTo>
+                <a:cubicBezTo>
+                  <a:pt x="12192" y="362306"/>
+                  <a:pt x="8774" y="295990"/>
+                  <a:pt x="36576" y="240386"/>
+                </a:cubicBezTo>
+                <a:cubicBezTo>
+                  <a:pt x="56840" y="199858"/>
+                  <a:pt x="99963" y="174822"/>
+                  <a:pt x="137160" y="148946"/>
+                </a:cubicBezTo>
+                <a:cubicBezTo>
+                  <a:pt x="170729" y="125593"/>
+                  <a:pt x="208264" y="107516"/>
+                  <a:pt x="246888" y="94082"/>
+                </a:cubicBezTo>
+                <a:cubicBezTo>
+                  <a:pt x="303870" y="74262"/>
+                  <a:pt x="421058" y="70538"/>
+                  <a:pt x="475488" y="66650"/>
+                </a:cubicBezTo>
+                <a:lnTo>
+                  <a:pt x="740664" y="75794"/>
+                </a:lnTo>
+                <a:cubicBezTo>
+                  <a:pt x="777323" y="77582"/>
+                  <a:pt x="814038" y="89987"/>
+                  <a:pt x="850392" y="84938"/>
+                </a:cubicBezTo>
+                <a:cubicBezTo>
+                  <a:pt x="925078" y="74565"/>
+                  <a:pt x="996696" y="48362"/>
+                  <a:pt x="1069848" y="30074"/>
+                </a:cubicBezTo>
+                <a:cubicBezTo>
+                  <a:pt x="1124843" y="-6589"/>
+                  <a:pt x="1117588" y="-9844"/>
+                  <a:pt x="1225296" y="20930"/>
+                </a:cubicBezTo>
+                <a:cubicBezTo>
+                  <a:pt x="1227657" y="21604"/>
+                  <a:pt x="1365134" y="86946"/>
+                  <a:pt x="1399032" y="112370"/>
+                </a:cubicBezTo>
+                <a:cubicBezTo>
+                  <a:pt x="1409377" y="120129"/>
+                  <a:pt x="1417320" y="130658"/>
+                  <a:pt x="1426464" y="139802"/>
+                </a:cubicBezTo>
+                <a:cubicBezTo>
+                  <a:pt x="1431104" y="158363"/>
+                  <a:pt x="1436881" y="185445"/>
+                  <a:pt x="1444752" y="203810"/>
+                </a:cubicBezTo>
+                <a:cubicBezTo>
+                  <a:pt x="1450122" y="216339"/>
+                  <a:pt x="1454314" y="229914"/>
+                  <a:pt x="1463040" y="240386"/>
+                </a:cubicBezTo>
+                <a:cubicBezTo>
+                  <a:pt x="1476570" y="256622"/>
+                  <a:pt x="1507666" y="266327"/>
+                  <a:pt x="1527048" y="267818"/>
+                </a:cubicBezTo>
+                <a:cubicBezTo>
+                  <a:pt x="1554399" y="269922"/>
+                  <a:pt x="1581912" y="267818"/>
+                  <a:pt x="1581912" y="276962"/>
+                </a:cubicBezTo>
+                <a:close/>
+              </a:path>
+            </a:pathLst>
+          </a:custGeom>
+          <a:noFill/>
+          <a:ln>
+            <a:solidFill>
+              <a:schemeClr val="tx1"/>
+            </a:solidFill>
+          </a:ln>
+        </p:spPr>
+        <p:style>
+          <a:lnRef idx="2">
+            <a:schemeClr val="accent1">
+              <a:shade val="15000"/>
+            </a:schemeClr>
+          </a:lnRef>
+          <a:fillRef idx="1">
+            <a:schemeClr val="accent1"/>
+          </a:fillRef>
+          <a:effectRef idx="0">
+            <a:schemeClr val="accent1"/>
+          </a:effectRef>
+          <a:fontRef idx="minor">
+            <a:schemeClr val="lt1"/>
+          </a:fontRef>
+        </p:style>
+        <p:txBody>
+          <a:bodyPr rtlCol="0" anchor="ctr"/>
+          <a:lstStyle/>
+          <a:p>
+            <a:pPr algn="ctr"/>
+            <a:r>
+              <a:rPr lang="nb-NO" sz="2800" dirty="0">
+                <a:solidFill>
+                  <a:schemeClr val="tx1"/>
+                </a:solidFill>
+              </a:rPr>
+              <a:t>Utvalget</a:t>
+            </a:r>
+          </a:p>
+        </p:txBody>
+      </p:sp>
+      <p:sp>
+        <p:nvSpPr>
+          <p:cNvPr id="4" name="Freeform: Shape 3">
+            <a:extLst>
+              <a:ext uri="{FF2B5EF4-FFF2-40B4-BE49-F238E27FC236}">
+                <a16:creationId xmlns:a16="http://schemas.microsoft.com/office/drawing/2014/main" id="{679CDD5D-94FD-E240-5D53-136F6266D934}"/>
+              </a:ext>
+            </a:extLst>
+          </p:cNvPr>
+          <p:cNvSpPr/>
+          <p:nvPr/>
+        </p:nvSpPr>
+        <p:spPr>
+          <a:xfrm>
+            <a:off x="4085336" y="420476"/>
+            <a:ext cx="2423197" cy="1410818"/>
+          </a:xfrm>
+          <a:custGeom>
+            <a:avLst/>
+            <a:gdLst>
+              <a:gd name="connsiteX0" fmla="*/ 1581912 w 2423197"/>
+              <a:gd name="connsiteY0" fmla="*/ 276962 h 1410818"/>
+              <a:gd name="connsiteX1" fmla="*/ 1581912 w 2423197"/>
+              <a:gd name="connsiteY1" fmla="*/ 276962 h 1410818"/>
+              <a:gd name="connsiteX2" fmla="*/ 1737360 w 2423197"/>
+              <a:gd name="connsiteY2" fmla="*/ 286106 h 1410818"/>
+              <a:gd name="connsiteX3" fmla="*/ 1819656 w 2423197"/>
+              <a:gd name="connsiteY3" fmla="*/ 350114 h 1410818"/>
+              <a:gd name="connsiteX4" fmla="*/ 1883664 w 2423197"/>
+              <a:gd name="connsiteY4" fmla="*/ 414122 h 1410818"/>
+              <a:gd name="connsiteX5" fmla="*/ 1993392 w 2423197"/>
+              <a:gd name="connsiteY5" fmla="*/ 478130 h 1410818"/>
+              <a:gd name="connsiteX6" fmla="*/ 2203704 w 2423197"/>
+              <a:gd name="connsiteY6" fmla="*/ 523850 h 1410818"/>
+              <a:gd name="connsiteX7" fmla="*/ 2322576 w 2423197"/>
+              <a:gd name="connsiteY7" fmla="*/ 551282 h 1410818"/>
+              <a:gd name="connsiteX8" fmla="*/ 2423160 w 2423197"/>
+              <a:gd name="connsiteY8" fmla="*/ 633578 h 1410818"/>
+              <a:gd name="connsiteX9" fmla="*/ 2267712 w 2423197"/>
+              <a:gd name="connsiteY9" fmla="*/ 999338 h 1410818"/>
+              <a:gd name="connsiteX10" fmla="*/ 1993392 w 2423197"/>
+              <a:gd name="connsiteY10" fmla="*/ 1237082 h 1410818"/>
+              <a:gd name="connsiteX11" fmla="*/ 1700784 w 2423197"/>
+              <a:gd name="connsiteY11" fmla="*/ 1392530 h 1410818"/>
+              <a:gd name="connsiteX12" fmla="*/ 1581912 w 2423197"/>
+              <a:gd name="connsiteY12" fmla="*/ 1410818 h 1410818"/>
+              <a:gd name="connsiteX13" fmla="*/ 1097280 w 2423197"/>
+              <a:gd name="connsiteY13" fmla="*/ 1374242 h 1410818"/>
+              <a:gd name="connsiteX14" fmla="*/ 777240 w 2423197"/>
+              <a:gd name="connsiteY14" fmla="*/ 1136498 h 1410818"/>
+              <a:gd name="connsiteX15" fmla="*/ 694944 w 2423197"/>
+              <a:gd name="connsiteY15" fmla="*/ 1109066 h 1410818"/>
+              <a:gd name="connsiteX16" fmla="*/ 457200 w 2423197"/>
+              <a:gd name="connsiteY16" fmla="*/ 1072490 h 1410818"/>
+              <a:gd name="connsiteX17" fmla="*/ 329184 w 2423197"/>
+              <a:gd name="connsiteY17" fmla="*/ 1054202 h 1410818"/>
+              <a:gd name="connsiteX18" fmla="*/ 201168 w 2423197"/>
+              <a:gd name="connsiteY18" fmla="*/ 917042 h 1410818"/>
+              <a:gd name="connsiteX19" fmla="*/ 109728 w 2423197"/>
+              <a:gd name="connsiteY19" fmla="*/ 715874 h 1410818"/>
+              <a:gd name="connsiteX20" fmla="*/ 54864 w 2423197"/>
+              <a:gd name="connsiteY20" fmla="*/ 560426 h 1410818"/>
+              <a:gd name="connsiteX21" fmla="*/ 0 w 2423197"/>
+              <a:gd name="connsiteY21" fmla="*/ 423266 h 1410818"/>
+              <a:gd name="connsiteX22" fmla="*/ 36576 w 2423197"/>
+              <a:gd name="connsiteY22" fmla="*/ 240386 h 1410818"/>
+              <a:gd name="connsiteX23" fmla="*/ 137160 w 2423197"/>
+              <a:gd name="connsiteY23" fmla="*/ 148946 h 1410818"/>
+              <a:gd name="connsiteX24" fmla="*/ 246888 w 2423197"/>
+              <a:gd name="connsiteY24" fmla="*/ 94082 h 1410818"/>
+              <a:gd name="connsiteX25" fmla="*/ 475488 w 2423197"/>
+              <a:gd name="connsiteY25" fmla="*/ 66650 h 1410818"/>
+              <a:gd name="connsiteX26" fmla="*/ 740664 w 2423197"/>
+              <a:gd name="connsiteY26" fmla="*/ 75794 h 1410818"/>
+              <a:gd name="connsiteX27" fmla="*/ 850392 w 2423197"/>
+              <a:gd name="connsiteY27" fmla="*/ 84938 h 1410818"/>
+              <a:gd name="connsiteX28" fmla="*/ 1069848 w 2423197"/>
+              <a:gd name="connsiteY28" fmla="*/ 30074 h 1410818"/>
+              <a:gd name="connsiteX29" fmla="*/ 1225296 w 2423197"/>
+              <a:gd name="connsiteY29" fmla="*/ 20930 h 1410818"/>
+              <a:gd name="connsiteX30" fmla="*/ 1399032 w 2423197"/>
+              <a:gd name="connsiteY30" fmla="*/ 112370 h 1410818"/>
+              <a:gd name="connsiteX31" fmla="*/ 1426464 w 2423197"/>
+              <a:gd name="connsiteY31" fmla="*/ 139802 h 1410818"/>
+              <a:gd name="connsiteX32" fmla="*/ 1444752 w 2423197"/>
+              <a:gd name="connsiteY32" fmla="*/ 203810 h 1410818"/>
+              <a:gd name="connsiteX33" fmla="*/ 1463040 w 2423197"/>
+              <a:gd name="connsiteY33" fmla="*/ 240386 h 1410818"/>
+              <a:gd name="connsiteX34" fmla="*/ 1527048 w 2423197"/>
+              <a:gd name="connsiteY34" fmla="*/ 267818 h 1410818"/>
+              <a:gd name="connsiteX35" fmla="*/ 1581912 w 2423197"/>
+              <a:gd name="connsiteY35" fmla="*/ 276962 h 1410818"/>
+            </a:gdLst>
+            <a:ahLst/>
+            <a:cxnLst>
+              <a:cxn ang="0">
+                <a:pos x="connsiteX0" y="connsiteY0"/>
+              </a:cxn>
+              <a:cxn ang="0">
+                <a:pos x="connsiteX1" y="connsiteY1"/>
+              </a:cxn>
+              <a:cxn ang="0">
+                <a:pos x="connsiteX2" y="connsiteY2"/>
+              </a:cxn>
+              <a:cxn ang="0">
+                <a:pos x="connsiteX3" y="connsiteY3"/>
+              </a:cxn>
+              <a:cxn ang="0">
+                <a:pos x="connsiteX4" y="connsiteY4"/>
+              </a:cxn>
+              <a:cxn ang="0">
+                <a:pos x="connsiteX5" y="connsiteY5"/>
+              </a:cxn>
+              <a:cxn ang="0">
+                <a:pos x="connsiteX6" y="connsiteY6"/>
+              </a:cxn>
+              <a:cxn ang="0">
+                <a:pos x="connsiteX7" y="connsiteY7"/>
+              </a:cxn>
+              <a:cxn ang="0">
+                <a:pos x="connsiteX8" y="connsiteY8"/>
+              </a:cxn>
+              <a:cxn ang="0">
+                <a:pos x="connsiteX9" y="connsiteY9"/>
+              </a:cxn>
+              <a:cxn ang="0">
+                <a:pos x="connsiteX10" y="connsiteY10"/>
+              </a:cxn>
+              <a:cxn ang="0">
+                <a:pos x="connsiteX11" y="connsiteY11"/>
+              </a:cxn>
+              <a:cxn ang="0">
+                <a:pos x="connsiteX12" y="connsiteY12"/>
+              </a:cxn>
+              <a:cxn ang="0">
+                <a:pos x="connsiteX13" y="connsiteY13"/>
+              </a:cxn>
+              <a:cxn ang="0">
+                <a:pos x="connsiteX14" y="connsiteY14"/>
+              </a:cxn>
+              <a:cxn ang="0">
+                <a:pos x="connsiteX15" y="connsiteY15"/>
+              </a:cxn>
+              <a:cxn ang="0">
+                <a:pos x="connsiteX16" y="connsiteY16"/>
+              </a:cxn>
+              <a:cxn ang="0">
+                <a:pos x="connsiteX17" y="connsiteY17"/>
+              </a:cxn>
+              <a:cxn ang="0">
+                <a:pos x="connsiteX18" y="connsiteY18"/>
+              </a:cxn>
+              <a:cxn ang="0">
+                <a:pos x="connsiteX19" y="connsiteY19"/>
+              </a:cxn>
+              <a:cxn ang="0">
+                <a:pos x="connsiteX20" y="connsiteY20"/>
+              </a:cxn>
+              <a:cxn ang="0">
+                <a:pos x="connsiteX21" y="connsiteY21"/>
+              </a:cxn>
+              <a:cxn ang="0">
+                <a:pos x="connsiteX22" y="connsiteY22"/>
+              </a:cxn>
+              <a:cxn ang="0">
+                <a:pos x="connsiteX23" y="connsiteY23"/>
+              </a:cxn>
+              <a:cxn ang="0">
+                <a:pos x="connsiteX24" y="connsiteY24"/>
+              </a:cxn>
+              <a:cxn ang="0">
+                <a:pos x="connsiteX25" y="connsiteY25"/>
+              </a:cxn>
+              <a:cxn ang="0">
+                <a:pos x="connsiteX26" y="connsiteY26"/>
+              </a:cxn>
+              <a:cxn ang="0">
+                <a:pos x="connsiteX27" y="connsiteY27"/>
+              </a:cxn>
+              <a:cxn ang="0">
+                <a:pos x="connsiteX28" y="connsiteY28"/>
+              </a:cxn>
+              <a:cxn ang="0">
+                <a:pos x="connsiteX29" y="connsiteY29"/>
+              </a:cxn>
+              <a:cxn ang="0">
+                <a:pos x="connsiteX30" y="connsiteY30"/>
+              </a:cxn>
+              <a:cxn ang="0">
+                <a:pos x="connsiteX31" y="connsiteY31"/>
+              </a:cxn>
+              <a:cxn ang="0">
+                <a:pos x="connsiteX32" y="connsiteY32"/>
+              </a:cxn>
+              <a:cxn ang="0">
+                <a:pos x="connsiteX33" y="connsiteY33"/>
+              </a:cxn>
+              <a:cxn ang="0">
+                <a:pos x="connsiteX34" y="connsiteY34"/>
+              </a:cxn>
+              <a:cxn ang="0">
+                <a:pos x="connsiteX35" y="connsiteY35"/>
+              </a:cxn>
+            </a:cxnLst>
+            <a:rect l="l" t="t" r="r" b="b"/>
+            <a:pathLst>
+              <a:path w="2423197" h="1410818">
+                <a:moveTo>
+                  <a:pt x="1581912" y="276962"/>
+                </a:moveTo>
+                <a:lnTo>
+                  <a:pt x="1581912" y="276962"/>
+                </a:lnTo>
+                <a:lnTo>
+                  <a:pt x="1737360" y="286106"/>
+                </a:lnTo>
+                <a:cubicBezTo>
+                  <a:pt x="1770576" y="296326"/>
+                  <a:pt x="1793502" y="327229"/>
+                  <a:pt x="1819656" y="350114"/>
+                </a:cubicBezTo>
+                <a:cubicBezTo>
+                  <a:pt x="1842364" y="369983"/>
+                  <a:pt x="1860102" y="395273"/>
+                  <a:pt x="1883664" y="414122"/>
+                </a:cubicBezTo>
+                <a:cubicBezTo>
+                  <a:pt x="1887423" y="417129"/>
+                  <a:pt x="1969472" y="470655"/>
+                  <a:pt x="1993392" y="478130"/>
+                </a:cubicBezTo>
+                <a:cubicBezTo>
+                  <a:pt x="2089279" y="508095"/>
+                  <a:pt x="2108419" y="503999"/>
+                  <a:pt x="2203704" y="523850"/>
+                </a:cubicBezTo>
+                <a:cubicBezTo>
+                  <a:pt x="2243515" y="532144"/>
+                  <a:pt x="2282952" y="542138"/>
+                  <a:pt x="2322576" y="551282"/>
+                </a:cubicBezTo>
+                <a:cubicBezTo>
+                  <a:pt x="2335470" y="558650"/>
+                  <a:pt x="2425286" y="599557"/>
+                  <a:pt x="2423160" y="633578"/>
+                </a:cubicBezTo>
+                <a:cubicBezTo>
+                  <a:pt x="2409677" y="849309"/>
+                  <a:pt x="2390340" y="866491"/>
+                  <a:pt x="2267712" y="999338"/>
+                </a:cubicBezTo>
+                <a:cubicBezTo>
+                  <a:pt x="2176133" y="1098548"/>
+                  <a:pt x="2107890" y="1160750"/>
+                  <a:pt x="1993392" y="1237082"/>
+                </a:cubicBezTo>
+                <a:cubicBezTo>
+                  <a:pt x="1940005" y="1272673"/>
+                  <a:pt x="1790343" y="1369167"/>
+                  <a:pt x="1700784" y="1392530"/>
+                </a:cubicBezTo>
+                <a:cubicBezTo>
+                  <a:pt x="1661992" y="1402650"/>
+                  <a:pt x="1621536" y="1404722"/>
+                  <a:pt x="1581912" y="1410818"/>
+                </a:cubicBezTo>
+                <a:cubicBezTo>
+                  <a:pt x="1420368" y="1398626"/>
+                  <a:pt x="1257798" y="1396131"/>
+                  <a:pt x="1097280" y="1374242"/>
+                </a:cubicBezTo>
+                <a:cubicBezTo>
+                  <a:pt x="815845" y="1335865"/>
+                  <a:pt x="1175158" y="1269137"/>
+                  <a:pt x="777240" y="1136498"/>
+                </a:cubicBezTo>
+                <a:cubicBezTo>
+                  <a:pt x="749808" y="1127354"/>
+                  <a:pt x="722908" y="1116425"/>
+                  <a:pt x="694944" y="1109066"/>
+                </a:cubicBezTo>
+                <a:cubicBezTo>
+                  <a:pt x="616049" y="1088304"/>
+                  <a:pt x="538312" y="1083305"/>
+                  <a:pt x="457200" y="1072490"/>
+                </a:cubicBezTo>
+                <a:lnTo>
+                  <a:pt x="329184" y="1054202"/>
+                </a:lnTo>
+                <a:cubicBezTo>
+                  <a:pt x="286512" y="1008482"/>
+                  <a:pt x="235202" y="969510"/>
+                  <a:pt x="201168" y="917042"/>
+                </a:cubicBezTo>
+                <a:cubicBezTo>
+                  <a:pt x="161084" y="855246"/>
+                  <a:pt x="137685" y="784020"/>
+                  <a:pt x="109728" y="715874"/>
+                </a:cubicBezTo>
+                <a:cubicBezTo>
+                  <a:pt x="88872" y="665037"/>
+                  <a:pt x="74158" y="611876"/>
+                  <a:pt x="54864" y="560426"/>
+                </a:cubicBezTo>
+                <a:cubicBezTo>
+                  <a:pt x="37574" y="514319"/>
+                  <a:pt x="18288" y="468986"/>
+                  <a:pt x="0" y="423266"/>
+                </a:cubicBezTo>
+                <a:cubicBezTo>
+                  <a:pt x="12192" y="362306"/>
+                  <a:pt x="8774" y="295990"/>
+                  <a:pt x="36576" y="240386"/>
+                </a:cubicBezTo>
+                <a:cubicBezTo>
+                  <a:pt x="56840" y="199858"/>
+                  <a:pt x="99963" y="174822"/>
+                  <a:pt x="137160" y="148946"/>
+                </a:cubicBezTo>
+                <a:cubicBezTo>
+                  <a:pt x="170729" y="125593"/>
+                  <a:pt x="208264" y="107516"/>
+                  <a:pt x="246888" y="94082"/>
+                </a:cubicBezTo>
+                <a:cubicBezTo>
+                  <a:pt x="303870" y="74262"/>
+                  <a:pt x="421058" y="70538"/>
+                  <a:pt x="475488" y="66650"/>
+                </a:cubicBezTo>
+                <a:lnTo>
+                  <a:pt x="740664" y="75794"/>
+                </a:lnTo>
+                <a:cubicBezTo>
+                  <a:pt x="777323" y="77582"/>
+                  <a:pt x="814038" y="89987"/>
+                  <a:pt x="850392" y="84938"/>
+                </a:cubicBezTo>
+                <a:cubicBezTo>
+                  <a:pt x="925078" y="74565"/>
+                  <a:pt x="996696" y="48362"/>
+                  <a:pt x="1069848" y="30074"/>
+                </a:cubicBezTo>
+                <a:cubicBezTo>
+                  <a:pt x="1124843" y="-6589"/>
+                  <a:pt x="1117588" y="-9844"/>
+                  <a:pt x="1225296" y="20930"/>
+                </a:cubicBezTo>
+                <a:cubicBezTo>
+                  <a:pt x="1227657" y="21604"/>
+                  <a:pt x="1365134" y="86946"/>
+                  <a:pt x="1399032" y="112370"/>
+                </a:cubicBezTo>
+                <a:cubicBezTo>
+                  <a:pt x="1409377" y="120129"/>
+                  <a:pt x="1417320" y="130658"/>
+                  <a:pt x="1426464" y="139802"/>
+                </a:cubicBezTo>
+                <a:cubicBezTo>
+                  <a:pt x="1431104" y="158363"/>
+                  <a:pt x="1436881" y="185445"/>
+                  <a:pt x="1444752" y="203810"/>
+                </a:cubicBezTo>
+                <a:cubicBezTo>
+                  <a:pt x="1450122" y="216339"/>
+                  <a:pt x="1454314" y="229914"/>
+                  <a:pt x="1463040" y="240386"/>
+                </a:cubicBezTo>
+                <a:cubicBezTo>
+                  <a:pt x="1476570" y="256622"/>
+                  <a:pt x="1507666" y="266327"/>
+                  <a:pt x="1527048" y="267818"/>
+                </a:cubicBezTo>
+                <a:cubicBezTo>
+                  <a:pt x="1554399" y="269922"/>
+                  <a:pt x="1581912" y="267818"/>
+                  <a:pt x="1581912" y="276962"/>
+                </a:cubicBezTo>
+                <a:close/>
+              </a:path>
+            </a:pathLst>
+          </a:custGeom>
+          <a:noFill/>
+          <a:ln>
+            <a:solidFill>
+              <a:schemeClr val="tx1">
+                <a:alpha val="42000"/>
+              </a:schemeClr>
+            </a:solidFill>
+            <a:prstDash val="sysDot"/>
+          </a:ln>
+        </p:spPr>
+        <p:style>
+          <a:lnRef idx="2">
+            <a:schemeClr val="accent1">
+              <a:shade val="15000"/>
+            </a:schemeClr>
+          </a:lnRef>
+          <a:fillRef idx="1">
+            <a:schemeClr val="accent1"/>
+          </a:fillRef>
+          <a:effectRef idx="0">
+            <a:schemeClr val="accent1"/>
+          </a:effectRef>
+          <a:fontRef idx="minor">
+            <a:schemeClr val="lt1"/>
+          </a:fontRef>
+        </p:style>
+        <p:txBody>
+          <a:bodyPr rtlCol="0" anchor="ctr"/>
+          <a:lstStyle/>
+          <a:p>
+            <a:pPr algn="ctr"/>
+            <a:endParaRPr lang="nb-NO" dirty="0">
+              <a:solidFill>
+                <a:schemeClr val="tx1"/>
+              </a:solidFill>
+            </a:endParaRPr>
+          </a:p>
+        </p:txBody>
+      </p:sp>
+      <p:cxnSp>
+        <p:nvCxnSpPr>
+          <p:cNvPr id="6" name="Straight Arrow Connector 5">
+            <a:extLst>
+              <a:ext uri="{FF2B5EF4-FFF2-40B4-BE49-F238E27FC236}">
+                <a16:creationId xmlns:a16="http://schemas.microsoft.com/office/drawing/2014/main" id="{934E8438-1E17-4742-8570-1A62D288B7B8}"/>
+              </a:ext>
+            </a:extLst>
+          </p:cNvPr>
+          <p:cNvCxnSpPr>
+            <a:stCxn id="4" idx="14"/>
+            <a:endCxn id="3" idx="29"/>
+          </p:cNvCxnSpPr>
+          <p:nvPr/>
+        </p:nvCxnSpPr>
+        <p:spPr>
+          <a:xfrm>
+            <a:off x="4862576" y="1556974"/>
+            <a:ext cx="777239" cy="1056603"/>
+          </a:xfrm>
+          <a:prstGeom prst="straightConnector1">
             <a:avLst/>
           </a:prstGeom>
+          <a:ln w="38100">
+            <a:tailEnd type="triangle"/>
+          </a:ln>
         </p:spPr>
-      </p:pic>
+        <p:style>
+          <a:lnRef idx="2">
+            <a:schemeClr val="dk1"/>
+          </a:lnRef>
+          <a:fillRef idx="0">
+            <a:schemeClr val="dk1"/>
+          </a:fillRef>
+          <a:effectRef idx="1">
+            <a:schemeClr val="dk1"/>
+          </a:effectRef>
+          <a:fontRef idx="minor">
+            <a:schemeClr val="tx1"/>
+          </a:fontRef>
+        </p:style>
+      </p:cxnSp>
       <p:sp>
         <p:nvSpPr>
           <p:cNvPr id="9" name="TextBox 8">
             <a:extLst>
               <a:ext uri="{FF2B5EF4-FFF2-40B4-BE49-F238E27FC236}">
-                <a16:creationId xmlns:a16="http://schemas.microsoft.com/office/drawing/2014/main" id="{612E364B-9158-693A-0836-C23556E3DF33}"/>
+                <a16:creationId xmlns:a16="http://schemas.microsoft.com/office/drawing/2014/main" id="{79533123-097B-CCDB-110F-CCFBB4C07011}"/>
               </a:ext>
             </a:extLst>
           </p:cNvPr>
@@ -5083,8 +5957,8 @@
         </p:nvSpPr>
         <p:spPr>
           <a:xfrm>
-            <a:off x="4930406" y="1389888"/>
-            <a:ext cx="3352800" cy="707886"/>
+            <a:off x="3834706" y="2100471"/>
+            <a:ext cx="1143369" cy="584775"/>
           </a:xfrm>
           <a:prstGeom prst="rect">
             <a:avLst/>
@@ -5099,18 +5973,64 @@
           <a:p>
             <a:pPr algn="l"/>
             <a:r>
-              <a:rPr lang="nb-NO" sz="2000" dirty="0"/>
-              <a:t>Forventningsrett utvalgsprosedyre</a:t>
-            </a:r>
-          </a:p>
-        </p:txBody>
-      </p:sp>
-      <p:sp>
-        <p:nvSpPr>
-          <p:cNvPr id="10" name="TextBox 9">
-            <a:extLst>
-              <a:ext uri="{FF2B5EF4-FFF2-40B4-BE49-F238E27FC236}">
-                <a16:creationId xmlns:a16="http://schemas.microsoft.com/office/drawing/2014/main" id="{76BBE5B5-66B1-97E8-71ED-F94A773110D6}"/>
+              <a:rPr lang="nb-NO" sz="1600" dirty="0"/>
+              <a:t>Gjøre et utvalg</a:t>
+            </a:r>
+          </a:p>
+        </p:txBody>
+      </p:sp>
+      <p:cxnSp>
+        <p:nvCxnSpPr>
+          <p:cNvPr id="11" name="Connector: Curved 10">
+            <a:extLst>
+              <a:ext uri="{FF2B5EF4-FFF2-40B4-BE49-F238E27FC236}">
+                <a16:creationId xmlns:a16="http://schemas.microsoft.com/office/drawing/2014/main" id="{B27B080F-2673-020A-8F72-E217AF6F8535}"/>
+              </a:ext>
+            </a:extLst>
+          </p:cNvPr>
+          <p:cNvCxnSpPr>
+            <a:cxnSpLocks/>
+            <a:stCxn id="3" idx="2"/>
+            <a:endCxn id="2" idx="4"/>
+          </p:cNvCxnSpPr>
+          <p:nvPr/>
+        </p:nvCxnSpPr>
+        <p:spPr>
+          <a:xfrm flipH="1" flipV="1">
+            <a:off x="6096000" y="2011680"/>
+            <a:ext cx="55879" cy="867073"/>
+          </a:xfrm>
+          <a:prstGeom prst="curvedConnector4">
+            <a:avLst>
+              <a:gd name="adj1" fmla="val -409098"/>
+              <a:gd name="adj2" fmla="val 66498"/>
+            </a:avLst>
+          </a:prstGeom>
+          <a:ln w="38100">
+            <a:tailEnd type="triangle"/>
+          </a:ln>
+        </p:spPr>
+        <p:style>
+          <a:lnRef idx="2">
+            <a:schemeClr val="dk1"/>
+          </a:lnRef>
+          <a:fillRef idx="0">
+            <a:schemeClr val="dk1"/>
+          </a:fillRef>
+          <a:effectRef idx="1">
+            <a:schemeClr val="dk1"/>
+          </a:effectRef>
+          <a:fontRef idx="minor">
+            <a:schemeClr val="tx1"/>
+          </a:fontRef>
+        </p:style>
+      </p:cxnSp>
+      <p:sp>
+        <p:nvSpPr>
+          <p:cNvPr id="16" name="TextBox 15">
+            <a:extLst>
+              <a:ext uri="{FF2B5EF4-FFF2-40B4-BE49-F238E27FC236}">
+                <a16:creationId xmlns:a16="http://schemas.microsoft.com/office/drawing/2014/main" id="{F8CE4E87-A8F7-7BD4-5767-136C92B89C40}"/>
               </a:ext>
             </a:extLst>
           </p:cNvPr>
@@ -5119,8 +6039,8 @@
         </p:nvSpPr>
         <p:spPr>
           <a:xfrm>
-            <a:off x="2105891" y="2658577"/>
-            <a:ext cx="3352800" cy="400110"/>
+            <a:off x="6417055" y="2297882"/>
+            <a:ext cx="1885697" cy="584775"/>
           </a:xfrm>
           <a:prstGeom prst="rect">
             <a:avLst/>
@@ -5135,18 +6055,944 @@
           <a:p>
             <a:pPr algn="l"/>
             <a:r>
-              <a:rPr lang="nb-NO" sz="2000" dirty="0"/>
-              <a:t>Populasjonen</a:t>
-            </a:r>
-          </a:p>
-        </p:txBody>
-      </p:sp>
-      <p:sp>
-        <p:nvSpPr>
-          <p:cNvPr id="11" name="TextBox 10">
-            <a:extLst>
-              <a:ext uri="{FF2B5EF4-FFF2-40B4-BE49-F238E27FC236}">
-                <a16:creationId xmlns:a16="http://schemas.microsoft.com/office/drawing/2014/main" id="{EF526EDE-AF94-BE57-37DD-22FED1D8A458}"/>
+              <a:rPr lang="nb-NO" sz="1600" dirty="0"/>
+              <a:t>Generalisere til populasjonen</a:t>
+            </a:r>
+          </a:p>
+        </p:txBody>
+      </p:sp>
+      <p:sp>
+        <p:nvSpPr>
+          <p:cNvPr id="13" name="Freeform: Shape 12">
+            <a:extLst>
+              <a:ext uri="{FF2B5EF4-FFF2-40B4-BE49-F238E27FC236}">
+                <a16:creationId xmlns:a16="http://schemas.microsoft.com/office/drawing/2014/main" id="{B85795B0-A2F3-D372-E663-00BBC89CC1F4}"/>
+              </a:ext>
+            </a:extLst>
+          </p:cNvPr>
+          <p:cNvSpPr/>
+          <p:nvPr/>
+        </p:nvSpPr>
+        <p:spPr>
+          <a:xfrm>
+            <a:off x="5840983" y="4584432"/>
+            <a:ext cx="2672081" cy="1410818"/>
+          </a:xfrm>
+          <a:custGeom>
+            <a:avLst/>
+            <a:gdLst>
+              <a:gd name="connsiteX0" fmla="*/ 1581912 w 2423197"/>
+              <a:gd name="connsiteY0" fmla="*/ 276962 h 1410818"/>
+              <a:gd name="connsiteX1" fmla="*/ 1581912 w 2423197"/>
+              <a:gd name="connsiteY1" fmla="*/ 276962 h 1410818"/>
+              <a:gd name="connsiteX2" fmla="*/ 1737360 w 2423197"/>
+              <a:gd name="connsiteY2" fmla="*/ 286106 h 1410818"/>
+              <a:gd name="connsiteX3" fmla="*/ 1819656 w 2423197"/>
+              <a:gd name="connsiteY3" fmla="*/ 350114 h 1410818"/>
+              <a:gd name="connsiteX4" fmla="*/ 1883664 w 2423197"/>
+              <a:gd name="connsiteY4" fmla="*/ 414122 h 1410818"/>
+              <a:gd name="connsiteX5" fmla="*/ 1993392 w 2423197"/>
+              <a:gd name="connsiteY5" fmla="*/ 478130 h 1410818"/>
+              <a:gd name="connsiteX6" fmla="*/ 2203704 w 2423197"/>
+              <a:gd name="connsiteY6" fmla="*/ 523850 h 1410818"/>
+              <a:gd name="connsiteX7" fmla="*/ 2322576 w 2423197"/>
+              <a:gd name="connsiteY7" fmla="*/ 551282 h 1410818"/>
+              <a:gd name="connsiteX8" fmla="*/ 2423160 w 2423197"/>
+              <a:gd name="connsiteY8" fmla="*/ 633578 h 1410818"/>
+              <a:gd name="connsiteX9" fmla="*/ 2267712 w 2423197"/>
+              <a:gd name="connsiteY9" fmla="*/ 999338 h 1410818"/>
+              <a:gd name="connsiteX10" fmla="*/ 1993392 w 2423197"/>
+              <a:gd name="connsiteY10" fmla="*/ 1237082 h 1410818"/>
+              <a:gd name="connsiteX11" fmla="*/ 1700784 w 2423197"/>
+              <a:gd name="connsiteY11" fmla="*/ 1392530 h 1410818"/>
+              <a:gd name="connsiteX12" fmla="*/ 1581912 w 2423197"/>
+              <a:gd name="connsiteY12" fmla="*/ 1410818 h 1410818"/>
+              <a:gd name="connsiteX13" fmla="*/ 1097280 w 2423197"/>
+              <a:gd name="connsiteY13" fmla="*/ 1374242 h 1410818"/>
+              <a:gd name="connsiteX14" fmla="*/ 777240 w 2423197"/>
+              <a:gd name="connsiteY14" fmla="*/ 1136498 h 1410818"/>
+              <a:gd name="connsiteX15" fmla="*/ 694944 w 2423197"/>
+              <a:gd name="connsiteY15" fmla="*/ 1109066 h 1410818"/>
+              <a:gd name="connsiteX16" fmla="*/ 457200 w 2423197"/>
+              <a:gd name="connsiteY16" fmla="*/ 1072490 h 1410818"/>
+              <a:gd name="connsiteX17" fmla="*/ 329184 w 2423197"/>
+              <a:gd name="connsiteY17" fmla="*/ 1054202 h 1410818"/>
+              <a:gd name="connsiteX18" fmla="*/ 201168 w 2423197"/>
+              <a:gd name="connsiteY18" fmla="*/ 917042 h 1410818"/>
+              <a:gd name="connsiteX19" fmla="*/ 109728 w 2423197"/>
+              <a:gd name="connsiteY19" fmla="*/ 715874 h 1410818"/>
+              <a:gd name="connsiteX20" fmla="*/ 54864 w 2423197"/>
+              <a:gd name="connsiteY20" fmla="*/ 560426 h 1410818"/>
+              <a:gd name="connsiteX21" fmla="*/ 0 w 2423197"/>
+              <a:gd name="connsiteY21" fmla="*/ 423266 h 1410818"/>
+              <a:gd name="connsiteX22" fmla="*/ 36576 w 2423197"/>
+              <a:gd name="connsiteY22" fmla="*/ 240386 h 1410818"/>
+              <a:gd name="connsiteX23" fmla="*/ 137160 w 2423197"/>
+              <a:gd name="connsiteY23" fmla="*/ 148946 h 1410818"/>
+              <a:gd name="connsiteX24" fmla="*/ 246888 w 2423197"/>
+              <a:gd name="connsiteY24" fmla="*/ 94082 h 1410818"/>
+              <a:gd name="connsiteX25" fmla="*/ 475488 w 2423197"/>
+              <a:gd name="connsiteY25" fmla="*/ 66650 h 1410818"/>
+              <a:gd name="connsiteX26" fmla="*/ 740664 w 2423197"/>
+              <a:gd name="connsiteY26" fmla="*/ 75794 h 1410818"/>
+              <a:gd name="connsiteX27" fmla="*/ 850392 w 2423197"/>
+              <a:gd name="connsiteY27" fmla="*/ 84938 h 1410818"/>
+              <a:gd name="connsiteX28" fmla="*/ 1069848 w 2423197"/>
+              <a:gd name="connsiteY28" fmla="*/ 30074 h 1410818"/>
+              <a:gd name="connsiteX29" fmla="*/ 1225296 w 2423197"/>
+              <a:gd name="connsiteY29" fmla="*/ 20930 h 1410818"/>
+              <a:gd name="connsiteX30" fmla="*/ 1399032 w 2423197"/>
+              <a:gd name="connsiteY30" fmla="*/ 112370 h 1410818"/>
+              <a:gd name="connsiteX31" fmla="*/ 1426464 w 2423197"/>
+              <a:gd name="connsiteY31" fmla="*/ 139802 h 1410818"/>
+              <a:gd name="connsiteX32" fmla="*/ 1444752 w 2423197"/>
+              <a:gd name="connsiteY32" fmla="*/ 203810 h 1410818"/>
+              <a:gd name="connsiteX33" fmla="*/ 1463040 w 2423197"/>
+              <a:gd name="connsiteY33" fmla="*/ 240386 h 1410818"/>
+              <a:gd name="connsiteX34" fmla="*/ 1527048 w 2423197"/>
+              <a:gd name="connsiteY34" fmla="*/ 267818 h 1410818"/>
+              <a:gd name="connsiteX35" fmla="*/ 1581912 w 2423197"/>
+              <a:gd name="connsiteY35" fmla="*/ 276962 h 1410818"/>
+            </a:gdLst>
+            <a:ahLst/>
+            <a:cxnLst>
+              <a:cxn ang="0">
+                <a:pos x="connsiteX0" y="connsiteY0"/>
+              </a:cxn>
+              <a:cxn ang="0">
+                <a:pos x="connsiteX1" y="connsiteY1"/>
+              </a:cxn>
+              <a:cxn ang="0">
+                <a:pos x="connsiteX2" y="connsiteY2"/>
+              </a:cxn>
+              <a:cxn ang="0">
+                <a:pos x="connsiteX3" y="connsiteY3"/>
+              </a:cxn>
+              <a:cxn ang="0">
+                <a:pos x="connsiteX4" y="connsiteY4"/>
+              </a:cxn>
+              <a:cxn ang="0">
+                <a:pos x="connsiteX5" y="connsiteY5"/>
+              </a:cxn>
+              <a:cxn ang="0">
+                <a:pos x="connsiteX6" y="connsiteY6"/>
+              </a:cxn>
+              <a:cxn ang="0">
+                <a:pos x="connsiteX7" y="connsiteY7"/>
+              </a:cxn>
+              <a:cxn ang="0">
+                <a:pos x="connsiteX8" y="connsiteY8"/>
+              </a:cxn>
+              <a:cxn ang="0">
+                <a:pos x="connsiteX9" y="connsiteY9"/>
+              </a:cxn>
+              <a:cxn ang="0">
+                <a:pos x="connsiteX10" y="connsiteY10"/>
+              </a:cxn>
+              <a:cxn ang="0">
+                <a:pos x="connsiteX11" y="connsiteY11"/>
+              </a:cxn>
+              <a:cxn ang="0">
+                <a:pos x="connsiteX12" y="connsiteY12"/>
+              </a:cxn>
+              <a:cxn ang="0">
+                <a:pos x="connsiteX13" y="connsiteY13"/>
+              </a:cxn>
+              <a:cxn ang="0">
+                <a:pos x="connsiteX14" y="connsiteY14"/>
+              </a:cxn>
+              <a:cxn ang="0">
+                <a:pos x="connsiteX15" y="connsiteY15"/>
+              </a:cxn>
+              <a:cxn ang="0">
+                <a:pos x="connsiteX16" y="connsiteY16"/>
+              </a:cxn>
+              <a:cxn ang="0">
+                <a:pos x="connsiteX17" y="connsiteY17"/>
+              </a:cxn>
+              <a:cxn ang="0">
+                <a:pos x="connsiteX18" y="connsiteY18"/>
+              </a:cxn>
+              <a:cxn ang="0">
+                <a:pos x="connsiteX19" y="connsiteY19"/>
+              </a:cxn>
+              <a:cxn ang="0">
+                <a:pos x="connsiteX20" y="connsiteY20"/>
+              </a:cxn>
+              <a:cxn ang="0">
+                <a:pos x="connsiteX21" y="connsiteY21"/>
+              </a:cxn>
+              <a:cxn ang="0">
+                <a:pos x="connsiteX22" y="connsiteY22"/>
+              </a:cxn>
+              <a:cxn ang="0">
+                <a:pos x="connsiteX23" y="connsiteY23"/>
+              </a:cxn>
+              <a:cxn ang="0">
+                <a:pos x="connsiteX24" y="connsiteY24"/>
+              </a:cxn>
+              <a:cxn ang="0">
+                <a:pos x="connsiteX25" y="connsiteY25"/>
+              </a:cxn>
+              <a:cxn ang="0">
+                <a:pos x="connsiteX26" y="connsiteY26"/>
+              </a:cxn>
+              <a:cxn ang="0">
+                <a:pos x="connsiteX27" y="connsiteY27"/>
+              </a:cxn>
+              <a:cxn ang="0">
+                <a:pos x="connsiteX28" y="connsiteY28"/>
+              </a:cxn>
+              <a:cxn ang="0">
+                <a:pos x="connsiteX29" y="connsiteY29"/>
+              </a:cxn>
+              <a:cxn ang="0">
+                <a:pos x="connsiteX30" y="connsiteY30"/>
+              </a:cxn>
+              <a:cxn ang="0">
+                <a:pos x="connsiteX31" y="connsiteY31"/>
+              </a:cxn>
+              <a:cxn ang="0">
+                <a:pos x="connsiteX32" y="connsiteY32"/>
+              </a:cxn>
+              <a:cxn ang="0">
+                <a:pos x="connsiteX33" y="connsiteY33"/>
+              </a:cxn>
+              <a:cxn ang="0">
+                <a:pos x="connsiteX34" y="connsiteY34"/>
+              </a:cxn>
+              <a:cxn ang="0">
+                <a:pos x="connsiteX35" y="connsiteY35"/>
+              </a:cxn>
+            </a:cxnLst>
+            <a:rect l="l" t="t" r="r" b="b"/>
+            <a:pathLst>
+              <a:path w="2423197" h="1410818">
+                <a:moveTo>
+                  <a:pt x="1581912" y="276962"/>
+                </a:moveTo>
+                <a:lnTo>
+                  <a:pt x="1581912" y="276962"/>
+                </a:lnTo>
+                <a:lnTo>
+                  <a:pt x="1737360" y="286106"/>
+                </a:lnTo>
+                <a:cubicBezTo>
+                  <a:pt x="1770576" y="296326"/>
+                  <a:pt x="1793502" y="327229"/>
+                  <a:pt x="1819656" y="350114"/>
+                </a:cubicBezTo>
+                <a:cubicBezTo>
+                  <a:pt x="1842364" y="369983"/>
+                  <a:pt x="1860102" y="395273"/>
+                  <a:pt x="1883664" y="414122"/>
+                </a:cubicBezTo>
+                <a:cubicBezTo>
+                  <a:pt x="1887423" y="417129"/>
+                  <a:pt x="1969472" y="470655"/>
+                  <a:pt x="1993392" y="478130"/>
+                </a:cubicBezTo>
+                <a:cubicBezTo>
+                  <a:pt x="2089279" y="508095"/>
+                  <a:pt x="2108419" y="503999"/>
+                  <a:pt x="2203704" y="523850"/>
+                </a:cubicBezTo>
+                <a:cubicBezTo>
+                  <a:pt x="2243515" y="532144"/>
+                  <a:pt x="2282952" y="542138"/>
+                  <a:pt x="2322576" y="551282"/>
+                </a:cubicBezTo>
+                <a:cubicBezTo>
+                  <a:pt x="2335470" y="558650"/>
+                  <a:pt x="2425286" y="599557"/>
+                  <a:pt x="2423160" y="633578"/>
+                </a:cubicBezTo>
+                <a:cubicBezTo>
+                  <a:pt x="2409677" y="849309"/>
+                  <a:pt x="2390340" y="866491"/>
+                  <a:pt x="2267712" y="999338"/>
+                </a:cubicBezTo>
+                <a:cubicBezTo>
+                  <a:pt x="2176133" y="1098548"/>
+                  <a:pt x="2107890" y="1160750"/>
+                  <a:pt x="1993392" y="1237082"/>
+                </a:cubicBezTo>
+                <a:cubicBezTo>
+                  <a:pt x="1940005" y="1272673"/>
+                  <a:pt x="1790343" y="1369167"/>
+                  <a:pt x="1700784" y="1392530"/>
+                </a:cubicBezTo>
+                <a:cubicBezTo>
+                  <a:pt x="1661992" y="1402650"/>
+                  <a:pt x="1621536" y="1404722"/>
+                  <a:pt x="1581912" y="1410818"/>
+                </a:cubicBezTo>
+                <a:cubicBezTo>
+                  <a:pt x="1420368" y="1398626"/>
+                  <a:pt x="1257798" y="1396131"/>
+                  <a:pt x="1097280" y="1374242"/>
+                </a:cubicBezTo>
+                <a:cubicBezTo>
+                  <a:pt x="815845" y="1335865"/>
+                  <a:pt x="1175158" y="1269137"/>
+                  <a:pt x="777240" y="1136498"/>
+                </a:cubicBezTo>
+                <a:cubicBezTo>
+                  <a:pt x="749808" y="1127354"/>
+                  <a:pt x="722908" y="1116425"/>
+                  <a:pt x="694944" y="1109066"/>
+                </a:cubicBezTo>
+                <a:cubicBezTo>
+                  <a:pt x="616049" y="1088304"/>
+                  <a:pt x="538312" y="1083305"/>
+                  <a:pt x="457200" y="1072490"/>
+                </a:cubicBezTo>
+                <a:lnTo>
+                  <a:pt x="329184" y="1054202"/>
+                </a:lnTo>
+                <a:cubicBezTo>
+                  <a:pt x="286512" y="1008482"/>
+                  <a:pt x="235202" y="969510"/>
+                  <a:pt x="201168" y="917042"/>
+                </a:cubicBezTo>
+                <a:cubicBezTo>
+                  <a:pt x="161084" y="855246"/>
+                  <a:pt x="137685" y="784020"/>
+                  <a:pt x="109728" y="715874"/>
+                </a:cubicBezTo>
+                <a:cubicBezTo>
+                  <a:pt x="88872" y="665037"/>
+                  <a:pt x="74158" y="611876"/>
+                  <a:pt x="54864" y="560426"/>
+                </a:cubicBezTo>
+                <a:cubicBezTo>
+                  <a:pt x="37574" y="514319"/>
+                  <a:pt x="18288" y="468986"/>
+                  <a:pt x="0" y="423266"/>
+                </a:cubicBezTo>
+                <a:cubicBezTo>
+                  <a:pt x="12192" y="362306"/>
+                  <a:pt x="8774" y="295990"/>
+                  <a:pt x="36576" y="240386"/>
+                </a:cubicBezTo>
+                <a:cubicBezTo>
+                  <a:pt x="56840" y="199858"/>
+                  <a:pt x="99963" y="174822"/>
+                  <a:pt x="137160" y="148946"/>
+                </a:cubicBezTo>
+                <a:cubicBezTo>
+                  <a:pt x="170729" y="125593"/>
+                  <a:pt x="208264" y="107516"/>
+                  <a:pt x="246888" y="94082"/>
+                </a:cubicBezTo>
+                <a:cubicBezTo>
+                  <a:pt x="303870" y="74262"/>
+                  <a:pt x="421058" y="70538"/>
+                  <a:pt x="475488" y="66650"/>
+                </a:cubicBezTo>
+                <a:lnTo>
+                  <a:pt x="740664" y="75794"/>
+                </a:lnTo>
+                <a:cubicBezTo>
+                  <a:pt x="777323" y="77582"/>
+                  <a:pt x="814038" y="89987"/>
+                  <a:pt x="850392" y="84938"/>
+                </a:cubicBezTo>
+                <a:cubicBezTo>
+                  <a:pt x="925078" y="74565"/>
+                  <a:pt x="996696" y="48362"/>
+                  <a:pt x="1069848" y="30074"/>
+                </a:cubicBezTo>
+                <a:cubicBezTo>
+                  <a:pt x="1124843" y="-6589"/>
+                  <a:pt x="1117588" y="-9844"/>
+                  <a:pt x="1225296" y="20930"/>
+                </a:cubicBezTo>
+                <a:cubicBezTo>
+                  <a:pt x="1227657" y="21604"/>
+                  <a:pt x="1365134" y="86946"/>
+                  <a:pt x="1399032" y="112370"/>
+                </a:cubicBezTo>
+                <a:cubicBezTo>
+                  <a:pt x="1409377" y="120129"/>
+                  <a:pt x="1417320" y="130658"/>
+                  <a:pt x="1426464" y="139802"/>
+                </a:cubicBezTo>
+                <a:cubicBezTo>
+                  <a:pt x="1431104" y="158363"/>
+                  <a:pt x="1436881" y="185445"/>
+                  <a:pt x="1444752" y="203810"/>
+                </a:cubicBezTo>
+                <a:cubicBezTo>
+                  <a:pt x="1450122" y="216339"/>
+                  <a:pt x="1454314" y="229914"/>
+                  <a:pt x="1463040" y="240386"/>
+                </a:cubicBezTo>
+                <a:cubicBezTo>
+                  <a:pt x="1476570" y="256622"/>
+                  <a:pt x="1507666" y="266327"/>
+                  <a:pt x="1527048" y="267818"/>
+                </a:cubicBezTo>
+                <a:cubicBezTo>
+                  <a:pt x="1554399" y="269922"/>
+                  <a:pt x="1581912" y="267818"/>
+                  <a:pt x="1581912" y="276962"/>
+                </a:cubicBezTo>
+                <a:close/>
+              </a:path>
+            </a:pathLst>
+          </a:custGeom>
+          <a:noFill/>
+          <a:ln>
+            <a:solidFill>
+              <a:schemeClr val="tx1"/>
+            </a:solidFill>
+          </a:ln>
+        </p:spPr>
+        <p:style>
+          <a:lnRef idx="2">
+            <a:schemeClr val="accent1">
+              <a:shade val="15000"/>
+            </a:schemeClr>
+          </a:lnRef>
+          <a:fillRef idx="1">
+            <a:schemeClr val="accent1"/>
+          </a:fillRef>
+          <a:effectRef idx="0">
+            <a:schemeClr val="accent1"/>
+          </a:effectRef>
+          <a:fontRef idx="minor">
+            <a:schemeClr val="lt1"/>
+          </a:fontRef>
+        </p:style>
+        <p:txBody>
+          <a:bodyPr rtlCol="0" anchor="ctr"/>
+          <a:lstStyle/>
+          <a:p>
+            <a:pPr algn="ctr"/>
+            <a:r>
+              <a:rPr lang="nb-NO" sz="2400" dirty="0">
+                <a:solidFill>
+                  <a:schemeClr val="tx1"/>
+                </a:solidFill>
+              </a:rPr>
+              <a:t>Kontrollgruppe</a:t>
+            </a:r>
+          </a:p>
+        </p:txBody>
+      </p:sp>
+      <p:sp>
+        <p:nvSpPr>
+          <p:cNvPr id="15" name="Freeform: Shape 14">
+            <a:extLst>
+              <a:ext uri="{FF2B5EF4-FFF2-40B4-BE49-F238E27FC236}">
+                <a16:creationId xmlns:a16="http://schemas.microsoft.com/office/drawing/2014/main" id="{360B545E-3F17-8031-36A9-0F1409553D29}"/>
+              </a:ext>
+            </a:extLst>
+          </p:cNvPr>
+          <p:cNvSpPr/>
+          <p:nvPr/>
+        </p:nvSpPr>
+        <p:spPr>
+          <a:xfrm>
+            <a:off x="3091178" y="4595617"/>
+            <a:ext cx="2672081" cy="1410818"/>
+          </a:xfrm>
+          <a:custGeom>
+            <a:avLst/>
+            <a:gdLst>
+              <a:gd name="connsiteX0" fmla="*/ 1581912 w 2423197"/>
+              <a:gd name="connsiteY0" fmla="*/ 276962 h 1410818"/>
+              <a:gd name="connsiteX1" fmla="*/ 1581912 w 2423197"/>
+              <a:gd name="connsiteY1" fmla="*/ 276962 h 1410818"/>
+              <a:gd name="connsiteX2" fmla="*/ 1737360 w 2423197"/>
+              <a:gd name="connsiteY2" fmla="*/ 286106 h 1410818"/>
+              <a:gd name="connsiteX3" fmla="*/ 1819656 w 2423197"/>
+              <a:gd name="connsiteY3" fmla="*/ 350114 h 1410818"/>
+              <a:gd name="connsiteX4" fmla="*/ 1883664 w 2423197"/>
+              <a:gd name="connsiteY4" fmla="*/ 414122 h 1410818"/>
+              <a:gd name="connsiteX5" fmla="*/ 1993392 w 2423197"/>
+              <a:gd name="connsiteY5" fmla="*/ 478130 h 1410818"/>
+              <a:gd name="connsiteX6" fmla="*/ 2203704 w 2423197"/>
+              <a:gd name="connsiteY6" fmla="*/ 523850 h 1410818"/>
+              <a:gd name="connsiteX7" fmla="*/ 2322576 w 2423197"/>
+              <a:gd name="connsiteY7" fmla="*/ 551282 h 1410818"/>
+              <a:gd name="connsiteX8" fmla="*/ 2423160 w 2423197"/>
+              <a:gd name="connsiteY8" fmla="*/ 633578 h 1410818"/>
+              <a:gd name="connsiteX9" fmla="*/ 2267712 w 2423197"/>
+              <a:gd name="connsiteY9" fmla="*/ 999338 h 1410818"/>
+              <a:gd name="connsiteX10" fmla="*/ 1993392 w 2423197"/>
+              <a:gd name="connsiteY10" fmla="*/ 1237082 h 1410818"/>
+              <a:gd name="connsiteX11" fmla="*/ 1700784 w 2423197"/>
+              <a:gd name="connsiteY11" fmla="*/ 1392530 h 1410818"/>
+              <a:gd name="connsiteX12" fmla="*/ 1581912 w 2423197"/>
+              <a:gd name="connsiteY12" fmla="*/ 1410818 h 1410818"/>
+              <a:gd name="connsiteX13" fmla="*/ 1097280 w 2423197"/>
+              <a:gd name="connsiteY13" fmla="*/ 1374242 h 1410818"/>
+              <a:gd name="connsiteX14" fmla="*/ 777240 w 2423197"/>
+              <a:gd name="connsiteY14" fmla="*/ 1136498 h 1410818"/>
+              <a:gd name="connsiteX15" fmla="*/ 694944 w 2423197"/>
+              <a:gd name="connsiteY15" fmla="*/ 1109066 h 1410818"/>
+              <a:gd name="connsiteX16" fmla="*/ 457200 w 2423197"/>
+              <a:gd name="connsiteY16" fmla="*/ 1072490 h 1410818"/>
+              <a:gd name="connsiteX17" fmla="*/ 329184 w 2423197"/>
+              <a:gd name="connsiteY17" fmla="*/ 1054202 h 1410818"/>
+              <a:gd name="connsiteX18" fmla="*/ 201168 w 2423197"/>
+              <a:gd name="connsiteY18" fmla="*/ 917042 h 1410818"/>
+              <a:gd name="connsiteX19" fmla="*/ 109728 w 2423197"/>
+              <a:gd name="connsiteY19" fmla="*/ 715874 h 1410818"/>
+              <a:gd name="connsiteX20" fmla="*/ 54864 w 2423197"/>
+              <a:gd name="connsiteY20" fmla="*/ 560426 h 1410818"/>
+              <a:gd name="connsiteX21" fmla="*/ 0 w 2423197"/>
+              <a:gd name="connsiteY21" fmla="*/ 423266 h 1410818"/>
+              <a:gd name="connsiteX22" fmla="*/ 36576 w 2423197"/>
+              <a:gd name="connsiteY22" fmla="*/ 240386 h 1410818"/>
+              <a:gd name="connsiteX23" fmla="*/ 137160 w 2423197"/>
+              <a:gd name="connsiteY23" fmla="*/ 148946 h 1410818"/>
+              <a:gd name="connsiteX24" fmla="*/ 246888 w 2423197"/>
+              <a:gd name="connsiteY24" fmla="*/ 94082 h 1410818"/>
+              <a:gd name="connsiteX25" fmla="*/ 475488 w 2423197"/>
+              <a:gd name="connsiteY25" fmla="*/ 66650 h 1410818"/>
+              <a:gd name="connsiteX26" fmla="*/ 740664 w 2423197"/>
+              <a:gd name="connsiteY26" fmla="*/ 75794 h 1410818"/>
+              <a:gd name="connsiteX27" fmla="*/ 850392 w 2423197"/>
+              <a:gd name="connsiteY27" fmla="*/ 84938 h 1410818"/>
+              <a:gd name="connsiteX28" fmla="*/ 1069848 w 2423197"/>
+              <a:gd name="connsiteY28" fmla="*/ 30074 h 1410818"/>
+              <a:gd name="connsiteX29" fmla="*/ 1225296 w 2423197"/>
+              <a:gd name="connsiteY29" fmla="*/ 20930 h 1410818"/>
+              <a:gd name="connsiteX30" fmla="*/ 1399032 w 2423197"/>
+              <a:gd name="connsiteY30" fmla="*/ 112370 h 1410818"/>
+              <a:gd name="connsiteX31" fmla="*/ 1426464 w 2423197"/>
+              <a:gd name="connsiteY31" fmla="*/ 139802 h 1410818"/>
+              <a:gd name="connsiteX32" fmla="*/ 1444752 w 2423197"/>
+              <a:gd name="connsiteY32" fmla="*/ 203810 h 1410818"/>
+              <a:gd name="connsiteX33" fmla="*/ 1463040 w 2423197"/>
+              <a:gd name="connsiteY33" fmla="*/ 240386 h 1410818"/>
+              <a:gd name="connsiteX34" fmla="*/ 1527048 w 2423197"/>
+              <a:gd name="connsiteY34" fmla="*/ 267818 h 1410818"/>
+              <a:gd name="connsiteX35" fmla="*/ 1581912 w 2423197"/>
+              <a:gd name="connsiteY35" fmla="*/ 276962 h 1410818"/>
+            </a:gdLst>
+            <a:ahLst/>
+            <a:cxnLst>
+              <a:cxn ang="0">
+                <a:pos x="connsiteX0" y="connsiteY0"/>
+              </a:cxn>
+              <a:cxn ang="0">
+                <a:pos x="connsiteX1" y="connsiteY1"/>
+              </a:cxn>
+              <a:cxn ang="0">
+                <a:pos x="connsiteX2" y="connsiteY2"/>
+              </a:cxn>
+              <a:cxn ang="0">
+                <a:pos x="connsiteX3" y="connsiteY3"/>
+              </a:cxn>
+              <a:cxn ang="0">
+                <a:pos x="connsiteX4" y="connsiteY4"/>
+              </a:cxn>
+              <a:cxn ang="0">
+                <a:pos x="connsiteX5" y="connsiteY5"/>
+              </a:cxn>
+              <a:cxn ang="0">
+                <a:pos x="connsiteX6" y="connsiteY6"/>
+              </a:cxn>
+              <a:cxn ang="0">
+                <a:pos x="connsiteX7" y="connsiteY7"/>
+              </a:cxn>
+              <a:cxn ang="0">
+                <a:pos x="connsiteX8" y="connsiteY8"/>
+              </a:cxn>
+              <a:cxn ang="0">
+                <a:pos x="connsiteX9" y="connsiteY9"/>
+              </a:cxn>
+              <a:cxn ang="0">
+                <a:pos x="connsiteX10" y="connsiteY10"/>
+              </a:cxn>
+              <a:cxn ang="0">
+                <a:pos x="connsiteX11" y="connsiteY11"/>
+              </a:cxn>
+              <a:cxn ang="0">
+                <a:pos x="connsiteX12" y="connsiteY12"/>
+              </a:cxn>
+              <a:cxn ang="0">
+                <a:pos x="connsiteX13" y="connsiteY13"/>
+              </a:cxn>
+              <a:cxn ang="0">
+                <a:pos x="connsiteX14" y="connsiteY14"/>
+              </a:cxn>
+              <a:cxn ang="0">
+                <a:pos x="connsiteX15" y="connsiteY15"/>
+              </a:cxn>
+              <a:cxn ang="0">
+                <a:pos x="connsiteX16" y="connsiteY16"/>
+              </a:cxn>
+              <a:cxn ang="0">
+                <a:pos x="connsiteX17" y="connsiteY17"/>
+              </a:cxn>
+              <a:cxn ang="0">
+                <a:pos x="connsiteX18" y="connsiteY18"/>
+              </a:cxn>
+              <a:cxn ang="0">
+                <a:pos x="connsiteX19" y="connsiteY19"/>
+              </a:cxn>
+              <a:cxn ang="0">
+                <a:pos x="connsiteX20" y="connsiteY20"/>
+              </a:cxn>
+              <a:cxn ang="0">
+                <a:pos x="connsiteX21" y="connsiteY21"/>
+              </a:cxn>
+              <a:cxn ang="0">
+                <a:pos x="connsiteX22" y="connsiteY22"/>
+              </a:cxn>
+              <a:cxn ang="0">
+                <a:pos x="connsiteX23" y="connsiteY23"/>
+              </a:cxn>
+              <a:cxn ang="0">
+                <a:pos x="connsiteX24" y="connsiteY24"/>
+              </a:cxn>
+              <a:cxn ang="0">
+                <a:pos x="connsiteX25" y="connsiteY25"/>
+              </a:cxn>
+              <a:cxn ang="0">
+                <a:pos x="connsiteX26" y="connsiteY26"/>
+              </a:cxn>
+              <a:cxn ang="0">
+                <a:pos x="connsiteX27" y="connsiteY27"/>
+              </a:cxn>
+              <a:cxn ang="0">
+                <a:pos x="connsiteX28" y="connsiteY28"/>
+              </a:cxn>
+              <a:cxn ang="0">
+                <a:pos x="connsiteX29" y="connsiteY29"/>
+              </a:cxn>
+              <a:cxn ang="0">
+                <a:pos x="connsiteX30" y="connsiteY30"/>
+              </a:cxn>
+              <a:cxn ang="0">
+                <a:pos x="connsiteX31" y="connsiteY31"/>
+              </a:cxn>
+              <a:cxn ang="0">
+                <a:pos x="connsiteX32" y="connsiteY32"/>
+              </a:cxn>
+              <a:cxn ang="0">
+                <a:pos x="connsiteX33" y="connsiteY33"/>
+              </a:cxn>
+              <a:cxn ang="0">
+                <a:pos x="connsiteX34" y="connsiteY34"/>
+              </a:cxn>
+              <a:cxn ang="0">
+                <a:pos x="connsiteX35" y="connsiteY35"/>
+              </a:cxn>
+            </a:cxnLst>
+            <a:rect l="l" t="t" r="r" b="b"/>
+            <a:pathLst>
+              <a:path w="2423197" h="1410818">
+                <a:moveTo>
+                  <a:pt x="1581912" y="276962"/>
+                </a:moveTo>
+                <a:lnTo>
+                  <a:pt x="1581912" y="276962"/>
+                </a:lnTo>
+                <a:lnTo>
+                  <a:pt x="1737360" y="286106"/>
+                </a:lnTo>
+                <a:cubicBezTo>
+                  <a:pt x="1770576" y="296326"/>
+                  <a:pt x="1793502" y="327229"/>
+                  <a:pt x="1819656" y="350114"/>
+                </a:cubicBezTo>
+                <a:cubicBezTo>
+                  <a:pt x="1842364" y="369983"/>
+                  <a:pt x="1860102" y="395273"/>
+                  <a:pt x="1883664" y="414122"/>
+                </a:cubicBezTo>
+                <a:cubicBezTo>
+                  <a:pt x="1887423" y="417129"/>
+                  <a:pt x="1969472" y="470655"/>
+                  <a:pt x="1993392" y="478130"/>
+                </a:cubicBezTo>
+                <a:cubicBezTo>
+                  <a:pt x="2089279" y="508095"/>
+                  <a:pt x="2108419" y="503999"/>
+                  <a:pt x="2203704" y="523850"/>
+                </a:cubicBezTo>
+                <a:cubicBezTo>
+                  <a:pt x="2243515" y="532144"/>
+                  <a:pt x="2282952" y="542138"/>
+                  <a:pt x="2322576" y="551282"/>
+                </a:cubicBezTo>
+                <a:cubicBezTo>
+                  <a:pt x="2335470" y="558650"/>
+                  <a:pt x="2425286" y="599557"/>
+                  <a:pt x="2423160" y="633578"/>
+                </a:cubicBezTo>
+                <a:cubicBezTo>
+                  <a:pt x="2409677" y="849309"/>
+                  <a:pt x="2390340" y="866491"/>
+                  <a:pt x="2267712" y="999338"/>
+                </a:cubicBezTo>
+                <a:cubicBezTo>
+                  <a:pt x="2176133" y="1098548"/>
+                  <a:pt x="2107890" y="1160750"/>
+                  <a:pt x="1993392" y="1237082"/>
+                </a:cubicBezTo>
+                <a:cubicBezTo>
+                  <a:pt x="1940005" y="1272673"/>
+                  <a:pt x="1790343" y="1369167"/>
+                  <a:pt x="1700784" y="1392530"/>
+                </a:cubicBezTo>
+                <a:cubicBezTo>
+                  <a:pt x="1661992" y="1402650"/>
+                  <a:pt x="1621536" y="1404722"/>
+                  <a:pt x="1581912" y="1410818"/>
+                </a:cubicBezTo>
+                <a:cubicBezTo>
+                  <a:pt x="1420368" y="1398626"/>
+                  <a:pt x="1257798" y="1396131"/>
+                  <a:pt x="1097280" y="1374242"/>
+                </a:cubicBezTo>
+                <a:cubicBezTo>
+                  <a:pt x="815845" y="1335865"/>
+                  <a:pt x="1175158" y="1269137"/>
+                  <a:pt x="777240" y="1136498"/>
+                </a:cubicBezTo>
+                <a:cubicBezTo>
+                  <a:pt x="749808" y="1127354"/>
+                  <a:pt x="722908" y="1116425"/>
+                  <a:pt x="694944" y="1109066"/>
+                </a:cubicBezTo>
+                <a:cubicBezTo>
+                  <a:pt x="616049" y="1088304"/>
+                  <a:pt x="538312" y="1083305"/>
+                  <a:pt x="457200" y="1072490"/>
+                </a:cubicBezTo>
+                <a:lnTo>
+                  <a:pt x="329184" y="1054202"/>
+                </a:lnTo>
+                <a:cubicBezTo>
+                  <a:pt x="286512" y="1008482"/>
+                  <a:pt x="235202" y="969510"/>
+                  <a:pt x="201168" y="917042"/>
+                </a:cubicBezTo>
+                <a:cubicBezTo>
+                  <a:pt x="161084" y="855246"/>
+                  <a:pt x="137685" y="784020"/>
+                  <a:pt x="109728" y="715874"/>
+                </a:cubicBezTo>
+                <a:cubicBezTo>
+                  <a:pt x="88872" y="665037"/>
+                  <a:pt x="74158" y="611876"/>
+                  <a:pt x="54864" y="560426"/>
+                </a:cubicBezTo>
+                <a:cubicBezTo>
+                  <a:pt x="37574" y="514319"/>
+                  <a:pt x="18288" y="468986"/>
+                  <a:pt x="0" y="423266"/>
+                </a:cubicBezTo>
+                <a:cubicBezTo>
+                  <a:pt x="12192" y="362306"/>
+                  <a:pt x="8774" y="295990"/>
+                  <a:pt x="36576" y="240386"/>
+                </a:cubicBezTo>
+                <a:cubicBezTo>
+                  <a:pt x="56840" y="199858"/>
+                  <a:pt x="99963" y="174822"/>
+                  <a:pt x="137160" y="148946"/>
+                </a:cubicBezTo>
+                <a:cubicBezTo>
+                  <a:pt x="170729" y="125593"/>
+                  <a:pt x="208264" y="107516"/>
+                  <a:pt x="246888" y="94082"/>
+                </a:cubicBezTo>
+                <a:cubicBezTo>
+                  <a:pt x="303870" y="74262"/>
+                  <a:pt x="421058" y="70538"/>
+                  <a:pt x="475488" y="66650"/>
+                </a:cubicBezTo>
+                <a:lnTo>
+                  <a:pt x="740664" y="75794"/>
+                </a:lnTo>
+                <a:cubicBezTo>
+                  <a:pt x="777323" y="77582"/>
+                  <a:pt x="814038" y="89987"/>
+                  <a:pt x="850392" y="84938"/>
+                </a:cubicBezTo>
+                <a:cubicBezTo>
+                  <a:pt x="925078" y="74565"/>
+                  <a:pt x="996696" y="48362"/>
+                  <a:pt x="1069848" y="30074"/>
+                </a:cubicBezTo>
+                <a:cubicBezTo>
+                  <a:pt x="1124843" y="-6589"/>
+                  <a:pt x="1117588" y="-9844"/>
+                  <a:pt x="1225296" y="20930"/>
+                </a:cubicBezTo>
+                <a:cubicBezTo>
+                  <a:pt x="1227657" y="21604"/>
+                  <a:pt x="1365134" y="86946"/>
+                  <a:pt x="1399032" y="112370"/>
+                </a:cubicBezTo>
+                <a:cubicBezTo>
+                  <a:pt x="1409377" y="120129"/>
+                  <a:pt x="1417320" y="130658"/>
+                  <a:pt x="1426464" y="139802"/>
+                </a:cubicBezTo>
+                <a:cubicBezTo>
+                  <a:pt x="1431104" y="158363"/>
+                  <a:pt x="1436881" y="185445"/>
+                  <a:pt x="1444752" y="203810"/>
+                </a:cubicBezTo>
+                <a:cubicBezTo>
+                  <a:pt x="1450122" y="216339"/>
+                  <a:pt x="1454314" y="229914"/>
+                  <a:pt x="1463040" y="240386"/>
+                </a:cubicBezTo>
+                <a:cubicBezTo>
+                  <a:pt x="1476570" y="256622"/>
+                  <a:pt x="1507666" y="266327"/>
+                  <a:pt x="1527048" y="267818"/>
+                </a:cubicBezTo>
+                <a:cubicBezTo>
+                  <a:pt x="1554399" y="269922"/>
+                  <a:pt x="1581912" y="267818"/>
+                  <a:pt x="1581912" y="276962"/>
+                </a:cubicBezTo>
+                <a:close/>
+              </a:path>
+            </a:pathLst>
+          </a:custGeom>
+          <a:noFill/>
+          <a:ln>
+            <a:solidFill>
+              <a:schemeClr val="tx1"/>
+            </a:solidFill>
+          </a:ln>
+        </p:spPr>
+        <p:style>
+          <a:lnRef idx="2">
+            <a:schemeClr val="accent1">
+              <a:shade val="15000"/>
+            </a:schemeClr>
+          </a:lnRef>
+          <a:fillRef idx="1">
+            <a:schemeClr val="accent1"/>
+          </a:fillRef>
+          <a:effectRef idx="0">
+            <a:schemeClr val="accent1"/>
+          </a:effectRef>
+          <a:fontRef idx="minor">
+            <a:schemeClr val="lt1"/>
+          </a:fontRef>
+        </p:style>
+        <p:txBody>
+          <a:bodyPr rtlCol="0" anchor="ctr"/>
+          <a:lstStyle/>
+          <a:p>
+            <a:pPr algn="ctr"/>
+            <a:r>
+              <a:rPr lang="nb-NO" sz="2400" dirty="0">
+                <a:solidFill>
+                  <a:schemeClr val="tx1"/>
+                </a:solidFill>
+              </a:rPr>
+              <a:t>Intervensjons-gruppe</a:t>
+            </a:r>
+          </a:p>
+        </p:txBody>
+      </p:sp>
+      <p:cxnSp>
+        <p:nvCxnSpPr>
+          <p:cNvPr id="17" name="Straight Arrow Connector 16">
+            <a:extLst>
+              <a:ext uri="{FF2B5EF4-FFF2-40B4-BE49-F238E27FC236}">
+                <a16:creationId xmlns:a16="http://schemas.microsoft.com/office/drawing/2014/main" id="{CCF4F034-0944-7CDB-A75F-A41AA042445A}"/>
+              </a:ext>
+            </a:extLst>
+          </p:cNvPr>
+          <p:cNvCxnSpPr>
+            <a:cxnSpLocks/>
+            <a:stCxn id="3" idx="13"/>
+            <a:endCxn id="15" idx="4"/>
+          </p:cNvCxnSpPr>
+          <p:nvPr/>
+        </p:nvCxnSpPr>
+        <p:spPr>
+          <a:xfrm flipH="1">
+            <a:off x="5168311" y="3966889"/>
+            <a:ext cx="343488" cy="1042850"/>
+          </a:xfrm>
+          <a:prstGeom prst="straightConnector1">
+            <a:avLst/>
+          </a:prstGeom>
+          <a:ln w="38100">
+            <a:tailEnd type="triangle"/>
+          </a:ln>
+        </p:spPr>
+        <p:style>
+          <a:lnRef idx="2">
+            <a:schemeClr val="dk1"/>
+          </a:lnRef>
+          <a:fillRef idx="0">
+            <a:schemeClr val="dk1"/>
+          </a:fillRef>
+          <a:effectRef idx="1">
+            <a:schemeClr val="dk1"/>
+          </a:effectRef>
+          <a:fontRef idx="minor">
+            <a:schemeClr val="tx1"/>
+          </a:fontRef>
+        </p:style>
+      </p:cxnSp>
+      <p:cxnSp>
+        <p:nvCxnSpPr>
+          <p:cNvPr id="20" name="Straight Arrow Connector 19">
+            <a:extLst>
+              <a:ext uri="{FF2B5EF4-FFF2-40B4-BE49-F238E27FC236}">
+                <a16:creationId xmlns:a16="http://schemas.microsoft.com/office/drawing/2014/main" id="{137F77E8-B012-2386-9889-F089EE7F2262}"/>
+              </a:ext>
+            </a:extLst>
+          </p:cNvPr>
+          <p:cNvCxnSpPr>
+            <a:cxnSpLocks/>
+            <a:stCxn id="3" idx="12"/>
+            <a:endCxn id="13" idx="26"/>
+          </p:cNvCxnSpPr>
+          <p:nvPr/>
+        </p:nvCxnSpPr>
+        <p:spPr>
+          <a:xfrm>
+            <a:off x="5996431" y="4003465"/>
+            <a:ext cx="661289" cy="656761"/>
+          </a:xfrm>
+          <a:prstGeom prst="straightConnector1">
+            <a:avLst/>
+          </a:prstGeom>
+          <a:ln w="38100">
+            <a:tailEnd type="triangle"/>
+          </a:ln>
+        </p:spPr>
+        <p:style>
+          <a:lnRef idx="2">
+            <a:schemeClr val="dk1"/>
+          </a:lnRef>
+          <a:fillRef idx="0">
+            <a:schemeClr val="dk1"/>
+          </a:fillRef>
+          <a:effectRef idx="1">
+            <a:schemeClr val="dk1"/>
+          </a:effectRef>
+          <a:fontRef idx="minor">
+            <a:schemeClr val="tx1"/>
+          </a:fontRef>
+        </p:style>
+      </p:cxnSp>
+      <p:sp>
+        <p:nvSpPr>
+          <p:cNvPr id="26" name="TextBox 25">
+            <a:extLst>
+              <a:ext uri="{FF2B5EF4-FFF2-40B4-BE49-F238E27FC236}">
+                <a16:creationId xmlns:a16="http://schemas.microsoft.com/office/drawing/2014/main" id="{0F7E2577-B84B-597C-6AA5-30B526A785CB}"/>
               </a:ext>
             </a:extLst>
           </p:cNvPr>
@@ -5155,8 +7001,8 @@
         </p:nvSpPr>
         <p:spPr>
           <a:xfrm>
-            <a:off x="7848609" y="521307"/>
-            <a:ext cx="3352800" cy="1015663"/>
+            <a:off x="4267442" y="3966889"/>
+            <a:ext cx="1143369" cy="584775"/>
           </a:xfrm>
           <a:prstGeom prst="rect">
             <a:avLst/>
@@ -5171,16 +7017,265 @@
           <a:p>
             <a:pPr algn="l"/>
             <a:r>
-              <a:rPr lang="nb-NO" sz="2000" dirty="0"/>
-              <a:t>Utvalgene kan være skjeve, men vil i snitt være representative</a:t>
-            </a:r>
+              <a:rPr lang="nb-NO" sz="1600" dirty="0"/>
+              <a:t>Dele inn i grupper</a:t>
+            </a:r>
+          </a:p>
+        </p:txBody>
+      </p:sp>
+      <p:cxnSp>
+        <p:nvCxnSpPr>
+          <p:cNvPr id="27" name="Connector: Curved 26">
+            <a:extLst>
+              <a:ext uri="{FF2B5EF4-FFF2-40B4-BE49-F238E27FC236}">
+                <a16:creationId xmlns:a16="http://schemas.microsoft.com/office/drawing/2014/main" id="{27BF207D-BEF9-9E07-B38C-030C6BFE6F19}"/>
+              </a:ext>
+            </a:extLst>
+          </p:cNvPr>
+          <p:cNvCxnSpPr>
+            <a:cxnSpLocks/>
+            <a:stCxn id="13" idx="29"/>
+          </p:cNvCxnSpPr>
+          <p:nvPr/>
+        </p:nvCxnSpPr>
+        <p:spPr>
+          <a:xfrm flipH="1" flipV="1">
+            <a:off x="6508533" y="3761148"/>
+            <a:ext cx="683595" cy="844214"/>
+          </a:xfrm>
+          <a:prstGeom prst="curvedConnector4">
+            <a:avLst>
+              <a:gd name="adj1" fmla="val -33441"/>
+              <a:gd name="adj2" fmla="val 51240"/>
+            </a:avLst>
+          </a:prstGeom>
+          <a:ln w="38100">
+            <a:tailEnd type="triangle"/>
+          </a:ln>
+        </p:spPr>
+        <p:style>
+          <a:lnRef idx="2">
+            <a:schemeClr val="dk1"/>
+          </a:lnRef>
+          <a:fillRef idx="0">
+            <a:schemeClr val="dk1"/>
+          </a:fillRef>
+          <a:effectRef idx="1">
+            <a:schemeClr val="dk1"/>
+          </a:effectRef>
+          <a:fontRef idx="minor">
+            <a:schemeClr val="tx1"/>
+          </a:fontRef>
+        </p:style>
+      </p:cxnSp>
+      <p:sp>
+        <p:nvSpPr>
+          <p:cNvPr id="33" name="TextBox 32">
+            <a:extLst>
+              <a:ext uri="{FF2B5EF4-FFF2-40B4-BE49-F238E27FC236}">
+                <a16:creationId xmlns:a16="http://schemas.microsoft.com/office/drawing/2014/main" id="{5B2302BE-5DBA-2CC0-39F8-BAD25303E884}"/>
+              </a:ext>
+            </a:extLst>
+          </p:cNvPr>
+          <p:cNvSpPr txBox="1"/>
+          <p:nvPr/>
+        </p:nvSpPr>
+        <p:spPr>
+          <a:xfrm>
+            <a:off x="7349818" y="3500848"/>
+            <a:ext cx="1730212" cy="830997"/>
+          </a:xfrm>
+          <a:prstGeom prst="rect">
+            <a:avLst/>
+          </a:prstGeom>
+          <a:noFill/>
+        </p:spPr>
+        <p:txBody>
+          <a:bodyPr wrap="square" rtlCol="0">
+            <a:spAutoFit/>
+          </a:bodyPr>
+          <a:lstStyle/>
+          <a:p>
+            <a:pPr algn="l"/>
+            <a:r>
+              <a:rPr lang="nb-NO" sz="1600" dirty="0"/>
+              <a:t>Finne intervensjonens effekt i utvalget</a:t>
+            </a:r>
+          </a:p>
+        </p:txBody>
+      </p:sp>
+      <p:sp>
+        <p:nvSpPr>
+          <p:cNvPr id="34" name="Left Bracket 33">
+            <a:extLst>
+              <a:ext uri="{FF2B5EF4-FFF2-40B4-BE49-F238E27FC236}">
+                <a16:creationId xmlns:a16="http://schemas.microsoft.com/office/drawing/2014/main" id="{FAC62100-DE76-FCE2-98C6-7520F61C2A09}"/>
+              </a:ext>
+            </a:extLst>
+          </p:cNvPr>
+          <p:cNvSpPr/>
+          <p:nvPr/>
+        </p:nvSpPr>
+        <p:spPr>
+          <a:xfrm>
+            <a:off x="2871215" y="73152"/>
+            <a:ext cx="171435" cy="3054096"/>
+          </a:xfrm>
+          <a:prstGeom prst="leftBracket">
+            <a:avLst/>
+          </a:prstGeom>
+          <a:ln w="38100">
+            <a:headEnd type="none" w="med" len="med"/>
+            <a:tailEnd type="none" w="med" len="med"/>
+          </a:ln>
+        </p:spPr>
+        <p:style>
+          <a:lnRef idx="2">
+            <a:schemeClr val="dk1"/>
+          </a:lnRef>
+          <a:fillRef idx="0">
+            <a:schemeClr val="dk1"/>
+          </a:fillRef>
+          <a:effectRef idx="1">
+            <a:schemeClr val="dk1"/>
+          </a:effectRef>
+          <a:fontRef idx="minor">
+            <a:schemeClr val="tx1"/>
+          </a:fontRef>
+        </p:style>
+        <p:txBody>
+          <a:bodyPr rtlCol="0" anchor="ctr"/>
+          <a:lstStyle/>
+          <a:p>
+            <a:pPr algn="ctr"/>
+            <a:endParaRPr lang="nb-NO"/>
+          </a:p>
+        </p:txBody>
+      </p:sp>
+      <p:sp>
+        <p:nvSpPr>
+          <p:cNvPr id="36" name="TextBox 35">
+            <a:extLst>
+              <a:ext uri="{FF2B5EF4-FFF2-40B4-BE49-F238E27FC236}">
+                <a16:creationId xmlns:a16="http://schemas.microsoft.com/office/drawing/2014/main" id="{40471B9D-7E0A-32FD-6A5E-C3FA97C61219}"/>
+              </a:ext>
+            </a:extLst>
+          </p:cNvPr>
+          <p:cNvSpPr txBox="1"/>
+          <p:nvPr/>
+        </p:nvSpPr>
+        <p:spPr>
+          <a:xfrm>
+            <a:off x="1916315" y="1125885"/>
+            <a:ext cx="1143369" cy="584775"/>
+          </a:xfrm>
+          <a:prstGeom prst="rect">
+            <a:avLst/>
+          </a:prstGeom>
+          <a:noFill/>
+        </p:spPr>
+        <p:txBody>
+          <a:bodyPr wrap="square" rtlCol="0">
+            <a:spAutoFit/>
+          </a:bodyPr>
+          <a:lstStyle/>
+          <a:p>
+            <a:pPr algn="l"/>
+            <a:r>
+              <a:rPr lang="nb-NO" sz="1600" dirty="0"/>
+              <a:t>Tilfeldig utvalg</a:t>
+            </a:r>
+          </a:p>
+        </p:txBody>
+      </p:sp>
+      <p:sp>
+        <p:nvSpPr>
+          <p:cNvPr id="38" name="TextBox 37">
+            <a:extLst>
+              <a:ext uri="{FF2B5EF4-FFF2-40B4-BE49-F238E27FC236}">
+                <a16:creationId xmlns:a16="http://schemas.microsoft.com/office/drawing/2014/main" id="{18BE5357-DFE0-276A-AB7C-D276C55C4646}"/>
+              </a:ext>
+            </a:extLst>
+          </p:cNvPr>
+          <p:cNvSpPr txBox="1"/>
+          <p:nvPr/>
+        </p:nvSpPr>
+        <p:spPr>
+          <a:xfrm>
+            <a:off x="1916315" y="4075451"/>
+            <a:ext cx="1143369" cy="584775"/>
+          </a:xfrm>
+          <a:prstGeom prst="rect">
+            <a:avLst/>
+          </a:prstGeom>
+          <a:noFill/>
+        </p:spPr>
+        <p:txBody>
+          <a:bodyPr wrap="square" rtlCol="0">
+            <a:spAutoFit/>
+          </a:bodyPr>
+          <a:lstStyle/>
+          <a:p>
+            <a:pPr algn="l"/>
+            <a:r>
+              <a:rPr lang="nb-NO" sz="1600" dirty="0"/>
+              <a:t>Tilfeldig tilordning</a:t>
+            </a:r>
+          </a:p>
+        </p:txBody>
+      </p:sp>
+      <p:sp>
+        <p:nvSpPr>
+          <p:cNvPr id="40" name="Left Bracket 39">
+            <a:extLst>
+              <a:ext uri="{FF2B5EF4-FFF2-40B4-BE49-F238E27FC236}">
+                <a16:creationId xmlns:a16="http://schemas.microsoft.com/office/drawing/2014/main" id="{447130AF-A156-6E64-846C-05BFE96DDA49}"/>
+              </a:ext>
+            </a:extLst>
+          </p:cNvPr>
+          <p:cNvSpPr/>
+          <p:nvPr/>
+        </p:nvSpPr>
+        <p:spPr>
+          <a:xfrm>
+            <a:off x="2888248" y="3298056"/>
+            <a:ext cx="171435" cy="2697194"/>
+          </a:xfrm>
+          <a:prstGeom prst="leftBracket">
+            <a:avLst/>
+          </a:prstGeom>
+          <a:ln w="38100">
+            <a:headEnd type="none" w="med" len="med"/>
+            <a:tailEnd type="none" w="med" len="med"/>
+          </a:ln>
+        </p:spPr>
+        <p:style>
+          <a:lnRef idx="2">
+            <a:schemeClr val="dk1"/>
+          </a:lnRef>
+          <a:fillRef idx="0">
+            <a:schemeClr val="dk1"/>
+          </a:fillRef>
+          <a:effectRef idx="1">
+            <a:schemeClr val="dk1"/>
+          </a:effectRef>
+          <a:fontRef idx="minor">
+            <a:schemeClr val="tx1"/>
+          </a:fontRef>
+        </p:style>
+        <p:txBody>
+          <a:bodyPr rtlCol="0" anchor="ctr"/>
+          <a:lstStyle/>
+          <a:p>
+            <a:pPr algn="ctr"/>
+            <a:endParaRPr lang="nb-NO"/>
           </a:p>
         </p:txBody>
       </p:sp>
     </p:spTree>
     <p:extLst>
       <p:ext uri="{BB962C8B-B14F-4D97-AF65-F5344CB8AC3E}">
-        <p14:creationId xmlns:p14="http://schemas.microsoft.com/office/powerpoint/2010/main" val="704044252"/>
+        <p14:creationId xmlns:p14="http://schemas.microsoft.com/office/powerpoint/2010/main" val="3363171906"/>
       </p:ext>
     </p:extLst>
   </p:cSld>
@@ -5209,6 +7304,218 @@
       </p:grpSpPr>
       <p:pic>
         <p:nvPicPr>
+          <p:cNvPr id="3" name="Picture 2" descr="A diagram of a simple algorithm&#10;&#10;AI-generated content may be incorrect.">
+            <a:extLst>
+              <a:ext uri="{FF2B5EF4-FFF2-40B4-BE49-F238E27FC236}">
+                <a16:creationId xmlns:a16="http://schemas.microsoft.com/office/drawing/2014/main" id="{2C8ED2CD-828B-7CBA-E6D3-3D0CD4FD32E7}"/>
+              </a:ext>
+            </a:extLst>
+          </p:cNvPr>
+          <p:cNvPicPr>
+            <a:picLocks noChangeAspect="1"/>
+          </p:cNvPicPr>
+          <p:nvPr/>
+        </p:nvPicPr>
+        <p:blipFill>
+          <a:blip r:embed="rId2">
+            <a:extLst>
+              <a:ext uri="{28A0092B-C50C-407E-A947-70E740481C1C}">
+                <a14:useLocalDpi xmlns:a14="http://schemas.microsoft.com/office/drawing/2010/main" val="0"/>
+              </a:ext>
+            </a:extLst>
+          </a:blip>
+          <a:srcRect t="43372" r="58733"/>
+          <a:stretch>
+            <a:fillRect/>
+          </a:stretch>
+        </p:blipFill>
+        <p:spPr>
+          <a:xfrm>
+            <a:off x="990589" y="3035030"/>
+            <a:ext cx="4213709" cy="3365776"/>
+          </a:xfrm>
+          <a:prstGeom prst="rect">
+            <a:avLst/>
+          </a:prstGeom>
+        </p:spPr>
+      </p:pic>
+      <p:pic>
+        <p:nvPicPr>
+          <p:cNvPr id="8" name="Picture 7" descr="A diagram of a simple algorithm&#10;&#10;AI-generated content may be incorrect.">
+            <a:extLst>
+              <a:ext uri="{FF2B5EF4-FFF2-40B4-BE49-F238E27FC236}">
+                <a16:creationId xmlns:a16="http://schemas.microsoft.com/office/drawing/2014/main" id="{A8DEA372-C697-EC4D-16C4-7BF520C0B852}"/>
+              </a:ext>
+            </a:extLst>
+          </p:cNvPr>
+          <p:cNvPicPr>
+            <a:picLocks noChangeAspect="1"/>
+          </p:cNvPicPr>
+          <p:nvPr/>
+        </p:nvPicPr>
+        <p:blipFill>
+          <a:blip r:embed="rId2">
+            <a:extLst>
+              <a:ext uri="{28A0092B-C50C-407E-A947-70E740481C1C}">
+                <a14:useLocalDpi xmlns:a14="http://schemas.microsoft.com/office/drawing/2010/main" val="0"/>
+              </a:ext>
+            </a:extLst>
+          </a:blip>
+          <a:srcRect l="41267" t="18167"/>
+          <a:stretch>
+            <a:fillRect/>
+          </a:stretch>
+        </p:blipFill>
+        <p:spPr>
+          <a:xfrm>
+            <a:off x="5204298" y="1536970"/>
+            <a:ext cx="5997111" cy="4863836"/>
+          </a:xfrm>
+          <a:prstGeom prst="rect">
+            <a:avLst/>
+          </a:prstGeom>
+        </p:spPr>
+      </p:pic>
+      <p:sp>
+        <p:nvSpPr>
+          <p:cNvPr id="9" name="TextBox 8">
+            <a:extLst>
+              <a:ext uri="{FF2B5EF4-FFF2-40B4-BE49-F238E27FC236}">
+                <a16:creationId xmlns:a16="http://schemas.microsoft.com/office/drawing/2014/main" id="{612E364B-9158-693A-0836-C23556E3DF33}"/>
+              </a:ext>
+            </a:extLst>
+          </p:cNvPr>
+          <p:cNvSpPr txBox="1"/>
+          <p:nvPr/>
+        </p:nvSpPr>
+        <p:spPr>
+          <a:xfrm>
+            <a:off x="4930406" y="1389888"/>
+            <a:ext cx="3352800" cy="707886"/>
+          </a:xfrm>
+          <a:prstGeom prst="rect">
+            <a:avLst/>
+          </a:prstGeom>
+          <a:noFill/>
+        </p:spPr>
+        <p:txBody>
+          <a:bodyPr wrap="square" rtlCol="0">
+            <a:spAutoFit/>
+          </a:bodyPr>
+          <a:lstStyle/>
+          <a:p>
+            <a:pPr algn="l"/>
+            <a:r>
+              <a:rPr lang="nb-NO" sz="2000" dirty="0"/>
+              <a:t>Forventningsrett utvalgsprosedyre</a:t>
+            </a:r>
+          </a:p>
+        </p:txBody>
+      </p:sp>
+      <p:sp>
+        <p:nvSpPr>
+          <p:cNvPr id="10" name="TextBox 9">
+            <a:extLst>
+              <a:ext uri="{FF2B5EF4-FFF2-40B4-BE49-F238E27FC236}">
+                <a16:creationId xmlns:a16="http://schemas.microsoft.com/office/drawing/2014/main" id="{76BBE5B5-66B1-97E8-71ED-F94A773110D6}"/>
+              </a:ext>
+            </a:extLst>
+          </p:cNvPr>
+          <p:cNvSpPr txBox="1"/>
+          <p:nvPr/>
+        </p:nvSpPr>
+        <p:spPr>
+          <a:xfrm>
+            <a:off x="2105891" y="2658577"/>
+            <a:ext cx="3352800" cy="400110"/>
+          </a:xfrm>
+          <a:prstGeom prst="rect">
+            <a:avLst/>
+          </a:prstGeom>
+          <a:noFill/>
+        </p:spPr>
+        <p:txBody>
+          <a:bodyPr wrap="square" rtlCol="0">
+            <a:spAutoFit/>
+          </a:bodyPr>
+          <a:lstStyle/>
+          <a:p>
+            <a:pPr algn="l"/>
+            <a:r>
+              <a:rPr lang="nb-NO" sz="2000" dirty="0"/>
+              <a:t>Populasjonen</a:t>
+            </a:r>
+          </a:p>
+        </p:txBody>
+      </p:sp>
+      <p:sp>
+        <p:nvSpPr>
+          <p:cNvPr id="11" name="TextBox 10">
+            <a:extLst>
+              <a:ext uri="{FF2B5EF4-FFF2-40B4-BE49-F238E27FC236}">
+                <a16:creationId xmlns:a16="http://schemas.microsoft.com/office/drawing/2014/main" id="{EF526EDE-AF94-BE57-37DD-22FED1D8A458}"/>
+              </a:ext>
+            </a:extLst>
+          </p:cNvPr>
+          <p:cNvSpPr txBox="1"/>
+          <p:nvPr/>
+        </p:nvSpPr>
+        <p:spPr>
+          <a:xfrm>
+            <a:off x="7848609" y="521307"/>
+            <a:ext cx="3352800" cy="1015663"/>
+          </a:xfrm>
+          <a:prstGeom prst="rect">
+            <a:avLst/>
+          </a:prstGeom>
+          <a:noFill/>
+        </p:spPr>
+        <p:txBody>
+          <a:bodyPr wrap="square" rtlCol="0">
+            <a:spAutoFit/>
+          </a:bodyPr>
+          <a:lstStyle/>
+          <a:p>
+            <a:pPr algn="l"/>
+            <a:r>
+              <a:rPr lang="nb-NO" sz="2000" dirty="0"/>
+              <a:t>Utvalgene kan være skjeve, men vil i snitt være representative</a:t>
+            </a:r>
+          </a:p>
+        </p:txBody>
+      </p:sp>
+    </p:spTree>
+    <p:extLst>
+      <p:ext uri="{BB962C8B-B14F-4D97-AF65-F5344CB8AC3E}">
+        <p14:creationId xmlns:p14="http://schemas.microsoft.com/office/powerpoint/2010/main" val="704044252"/>
+      </p:ext>
+    </p:extLst>
+  </p:cSld>
+  <p:clrMapOvr>
+    <a:masterClrMapping/>
+  </p:clrMapOvr>
+</p:sld>
+</file>
+
+<file path=ppt/slides/slide5.xml><?xml version="1.0" encoding="utf-8"?>
+<p:sld xmlns:a="http://schemas.openxmlformats.org/drawingml/2006/main" xmlns:r="http://schemas.openxmlformats.org/officeDocument/2006/relationships" xmlns:p="http://schemas.openxmlformats.org/presentationml/2006/main">
+  <p:cSld>
+    <p:spTree>
+      <p:nvGrpSpPr>
+        <p:cNvPr id="1" name=""/>
+        <p:cNvGrpSpPr/>
+        <p:nvPr/>
+      </p:nvGrpSpPr>
+      <p:grpSpPr>
+        <a:xfrm>
+          <a:off x="0" y="0"/>
+          <a:ext cx="0" cy="0"/>
+          <a:chOff x="0" y="0"/>
+          <a:chExt cx="0" cy="0"/>
+        </a:xfrm>
+      </p:grpSpPr>
+      <p:pic>
+        <p:nvPicPr>
           <p:cNvPr id="5" name="Picture 4" descr="A diagram of a diagram&#10;&#10;AI-generated content may be incorrect.">
             <a:extLst>
               <a:ext uri="{FF2B5EF4-FFF2-40B4-BE49-F238E27FC236}">
@@ -5402,7 +7709,7 @@
 </p:sld>
 </file>
 
-<file path=ppt/slides/slide5.xml><?xml version="1.0" encoding="utf-8"?>
+<file path=ppt/slides/slide6.xml><?xml version="1.0" encoding="utf-8"?>
 <p:sld xmlns:a="http://schemas.openxmlformats.org/drawingml/2006/main" xmlns:r="http://schemas.openxmlformats.org/officeDocument/2006/relationships" xmlns:p="http://schemas.openxmlformats.org/presentationml/2006/main">
   <p:cSld>
     <p:spTree>
